--- a/docs/public/downloads/ppt/01_management_business_case_zh.pptx
+++ b/docs/public/downloads/ppt/01_management_business_case_zh.pptx
@@ -5,30 +5,30 @@
     <p:sldMasterId id="2147483648" r:id="rId1"/>
   </p:sldMasterIdLst>
   <p:sldIdLst>
-    <p:sldId id="256" r:id="rId7"/>
-    <p:sldId id="257" r:id="rId8"/>
-    <p:sldId id="258" r:id="rId9"/>
-    <p:sldId id="259" r:id="rId10"/>
-    <p:sldId id="260" r:id="rId11"/>
-    <p:sldId id="261" r:id="rId12"/>
-    <p:sldId id="262" r:id="rId13"/>
-    <p:sldId id="263" r:id="rId14"/>
-    <p:sldId id="264" r:id="rId15"/>
-    <p:sldId id="265" r:id="rId16"/>
-    <p:sldId id="266" r:id="rId17"/>
-    <p:sldId id="267" r:id="rId18"/>
-    <p:sldId id="268" r:id="rId19"/>
-    <p:sldId id="269" r:id="rId20"/>
-    <p:sldId id="270" r:id="rId21"/>
-    <p:sldId id="271" r:id="rId22"/>
-    <p:sldId id="272" r:id="rId23"/>
-    <p:sldId id="273" r:id="rId24"/>
-    <p:sldId id="274" r:id="rId25"/>
-    <p:sldId id="275" r:id="rId26"/>
-    <p:sldId id="276" r:id="rId27"/>
-    <p:sldId id="277" r:id="rId28"/>
+    <p:sldId id="256" r:id="rId2"/>
+    <p:sldId id="257" r:id="rId3"/>
+    <p:sldId id="258" r:id="rId4"/>
+    <p:sldId id="259" r:id="rId5"/>
+    <p:sldId id="260" r:id="rId6"/>
+    <p:sldId id="261" r:id="rId7"/>
+    <p:sldId id="262" r:id="rId8"/>
+    <p:sldId id="263" r:id="rId9"/>
+    <p:sldId id="264" r:id="rId10"/>
+    <p:sldId id="265" r:id="rId11"/>
+    <p:sldId id="266" r:id="rId12"/>
+    <p:sldId id="267" r:id="rId13"/>
+    <p:sldId id="268" r:id="rId14"/>
+    <p:sldId id="269" r:id="rId15"/>
+    <p:sldId id="270" r:id="rId16"/>
+    <p:sldId id="271" r:id="rId17"/>
+    <p:sldId id="272" r:id="rId18"/>
+    <p:sldId id="273" r:id="rId19"/>
+    <p:sldId id="274" r:id="rId20"/>
+    <p:sldId id="275" r:id="rId21"/>
+    <p:sldId id="276" r:id="rId22"/>
+    <p:sldId id="277" r:id="rId23"/>
   </p:sldIdLst>
-  <p:sldSz cx="12188952" cy="6858000" type="screen4x3"/>
+  <p:sldSz cx="12188825" cy="6858000"/>
   <p:notesSz cx="6858000" cy="9144000"/>
   <p:defaultTextStyle>
     <a:defPPr>
@@ -125,7 +125,84 @@
       </a:defRPr>
     </a:lvl9pPr>
   </p:defaultTextStyle>
+  <p:extLst>
+    <p:ext uri="{EFAFB233-063F-42B5-8137-9DF3F51BA10A}">
+      <p15:sldGuideLst xmlns:p15="http://schemas.microsoft.com/office/powerpoint/2012/main">
+        <p15:guide id="1" orient="horz" pos="2160">
+          <p15:clr>
+            <a:srgbClr val="A4A3A4"/>
+          </p15:clr>
+        </p15:guide>
+        <p15:guide id="2" pos="2880">
+          <p15:clr>
+            <a:srgbClr val="A4A3A4"/>
+          </p15:clr>
+        </p15:guide>
+      </p15:sldGuideLst>
+    </p:ext>
+  </p:extLst>
 </p:presentation>
+</file>
+
+<file path=ppt/changesInfos/changesInfo1.xml><?xml version="1.0" encoding="utf-8"?>
+<pc:chgInfo xmlns:a="http://schemas.openxmlformats.org/drawingml/2006/main" xmlns:r="http://schemas.openxmlformats.org/officeDocument/2006/relationships" xmlns:ac="http://schemas.microsoft.com/office/drawing/2013/main/command" xmlns:pc="http://schemas.microsoft.com/office/powerpoint/2013/main/command">
+  <pc:docChgLst>
+    <pc:chgData name="Jack Zhong" userId="103a72fdc47caf9a" providerId="LiveId" clId="{241CEE3F-E019-4D18-BE04-9ADE5BA626CC}"/>
+    <pc:docChg chg="modSld">
+      <pc:chgData name="Jack Zhong" userId="103a72fdc47caf9a" providerId="LiveId" clId="{241CEE3F-E019-4D18-BE04-9ADE5BA626CC}" dt="2026-04-06T09:10:16.544" v="27" actId="20577"/>
+      <pc:docMkLst>
+        <pc:docMk/>
+      </pc:docMkLst>
+      <pc:sldChg chg="modSp mod">
+        <pc:chgData name="Jack Zhong" userId="103a72fdc47caf9a" providerId="LiveId" clId="{241CEE3F-E019-4D18-BE04-9ADE5BA626CC}" dt="2026-04-06T09:10:16.544" v="27" actId="20577"/>
+        <pc:sldMkLst>
+          <pc:docMk/>
+          <pc:sldMk cId="0" sldId="275"/>
+        </pc:sldMkLst>
+        <pc:spChg chg="mod">
+          <ac:chgData name="Jack Zhong" userId="103a72fdc47caf9a" providerId="LiveId" clId="{241CEE3F-E019-4D18-BE04-9ADE5BA626CC}" dt="2026-04-06T09:09:45.947" v="4"/>
+          <ac:spMkLst>
+            <pc:docMk/>
+            <pc:sldMk cId="0" sldId="275"/>
+            <ac:spMk id="17" creationId="{00000000-0000-0000-0000-000000000000}"/>
+          </ac:spMkLst>
+        </pc:spChg>
+        <pc:spChg chg="mod">
+          <ac:chgData name="Jack Zhong" userId="103a72fdc47caf9a" providerId="LiveId" clId="{241CEE3F-E019-4D18-BE04-9ADE5BA626CC}" dt="2026-04-06T09:09:52.108" v="9" actId="20577"/>
+          <ac:spMkLst>
+            <pc:docMk/>
+            <pc:sldMk cId="0" sldId="275"/>
+            <ac:spMk id="27" creationId="{00000000-0000-0000-0000-000000000000}"/>
+          </ac:spMkLst>
+        </pc:spChg>
+        <pc:spChg chg="mod">
+          <ac:chgData name="Jack Zhong" userId="103a72fdc47caf9a" providerId="LiveId" clId="{241CEE3F-E019-4D18-BE04-9ADE5BA626CC}" dt="2026-04-06T09:10:03.265" v="15" actId="20577"/>
+          <ac:spMkLst>
+            <pc:docMk/>
+            <pc:sldMk cId="0" sldId="275"/>
+            <ac:spMk id="37" creationId="{00000000-0000-0000-0000-000000000000}"/>
+          </ac:spMkLst>
+        </pc:spChg>
+        <pc:spChg chg="mod">
+          <ac:chgData name="Jack Zhong" userId="103a72fdc47caf9a" providerId="LiveId" clId="{241CEE3F-E019-4D18-BE04-9ADE5BA626CC}" dt="2026-04-06T09:10:11.758" v="18" actId="20577"/>
+          <ac:spMkLst>
+            <pc:docMk/>
+            <pc:sldMk cId="0" sldId="275"/>
+            <ac:spMk id="47" creationId="{00000000-0000-0000-0000-000000000000}"/>
+          </ac:spMkLst>
+        </pc:spChg>
+        <pc:spChg chg="mod">
+          <ac:chgData name="Jack Zhong" userId="103a72fdc47caf9a" providerId="LiveId" clId="{241CEE3F-E019-4D18-BE04-9ADE5BA626CC}" dt="2026-04-06T09:10:16.544" v="27" actId="20577"/>
+          <ac:spMkLst>
+            <pc:docMk/>
+            <pc:sldMk cId="0" sldId="275"/>
+            <ac:spMk id="57" creationId="{00000000-0000-0000-0000-000000000000}"/>
+          </ac:spMkLst>
+        </pc:spChg>
+      </pc:sldChg>
+    </pc:docChg>
+  </pc:docChgLst>
+</pc:chgInfo>
 </file>
 
 <file path=ppt/slideLayouts/slideLayout1.xml><?xml version="1.0" encoding="utf-8"?>
@@ -166,10 +243,9 @@
           <a:lstStyle/>
           <a:p>
             <a:r>
-              <a:rPr lang="en-US" smtClean="0"/>
+              <a:rPr lang="en-US"/>
               <a:t>Click to edit Master title style</a:t>
             </a:r>
-            <a:endParaRPr lang="en-US"/>
           </a:p>
         </p:txBody>
       </p:sp>
@@ -285,10 +361,9 @@
           </a:lstStyle>
           <a:p>
             <a:r>
-              <a:rPr lang="en-US" smtClean="0"/>
+              <a:rPr lang="en-US"/>
               <a:t>Click to edit Master subtitle style</a:t>
             </a:r>
-            <a:endParaRPr lang="en-US"/>
           </a:p>
         </p:txBody>
       </p:sp>
@@ -309,7 +384,7 @@
           <a:p>
             <a:fld id="{5BCAD085-E8A6-8845-BD4E-CB4CCA059FC4}" type="datetimeFigureOut">
               <a:rPr lang="en-US" smtClean="0"/>
-              <a:t>1/27/13</a:t>
+              <a:t>4/6/2026</a:t>
             </a:fld>
             <a:endParaRPr lang="en-US"/>
           </a:p>
@@ -403,10 +478,9 @@
           <a:lstStyle/>
           <a:p>
             <a:r>
-              <a:rPr lang="en-US" smtClean="0"/>
+              <a:rPr lang="en-US"/>
               <a:t>Click to edit Master title style</a:t>
             </a:r>
-            <a:endParaRPr lang="en-US"/>
           </a:p>
         </p:txBody>
       </p:sp>
@@ -427,38 +501,37 @@
           <a:p>
             <a:pPr lvl="0"/>
             <a:r>
-              <a:rPr lang="en-US" smtClean="0"/>
+              <a:rPr lang="en-US"/>
               <a:t>Click to edit Master text styles</a:t>
             </a:r>
           </a:p>
           <a:p>
             <a:pPr lvl="1"/>
             <a:r>
-              <a:rPr lang="en-US" smtClean="0"/>
+              <a:rPr lang="en-US"/>
               <a:t>Second level</a:t>
             </a:r>
           </a:p>
           <a:p>
             <a:pPr lvl="2"/>
             <a:r>
-              <a:rPr lang="en-US" smtClean="0"/>
+              <a:rPr lang="en-US"/>
               <a:t>Third level</a:t>
             </a:r>
           </a:p>
           <a:p>
             <a:pPr lvl="3"/>
             <a:r>
-              <a:rPr lang="en-US" smtClean="0"/>
+              <a:rPr lang="en-US"/>
               <a:t>Fourth level</a:t>
             </a:r>
           </a:p>
           <a:p>
             <a:pPr lvl="4"/>
             <a:r>
-              <a:rPr lang="en-US" smtClean="0"/>
+              <a:rPr lang="en-US"/>
               <a:t>Fifth level</a:t>
             </a:r>
-            <a:endParaRPr lang="en-US"/>
           </a:p>
         </p:txBody>
       </p:sp>
@@ -479,7 +552,7 @@
           <a:p>
             <a:fld id="{5BCAD085-E8A6-8845-BD4E-CB4CCA059FC4}" type="datetimeFigureOut">
               <a:rPr lang="en-US" smtClean="0"/>
-              <a:t>1/27/13</a:t>
+              <a:t>4/6/2026</a:t>
             </a:fld>
             <a:endParaRPr lang="en-US"/>
           </a:p>
@@ -578,10 +651,9 @@
           <a:lstStyle/>
           <a:p>
             <a:r>
-              <a:rPr lang="en-US" smtClean="0"/>
+              <a:rPr lang="en-US"/>
               <a:t>Click to edit Master title style</a:t>
             </a:r>
-            <a:endParaRPr lang="en-US"/>
           </a:p>
         </p:txBody>
       </p:sp>
@@ -607,38 +679,37 @@
           <a:p>
             <a:pPr lvl="0"/>
             <a:r>
-              <a:rPr lang="en-US" smtClean="0"/>
+              <a:rPr lang="en-US"/>
               <a:t>Click to edit Master text styles</a:t>
             </a:r>
           </a:p>
           <a:p>
             <a:pPr lvl="1"/>
             <a:r>
-              <a:rPr lang="en-US" smtClean="0"/>
+              <a:rPr lang="en-US"/>
               <a:t>Second level</a:t>
             </a:r>
           </a:p>
           <a:p>
             <a:pPr lvl="2"/>
             <a:r>
-              <a:rPr lang="en-US" smtClean="0"/>
+              <a:rPr lang="en-US"/>
               <a:t>Third level</a:t>
             </a:r>
           </a:p>
           <a:p>
             <a:pPr lvl="3"/>
             <a:r>
-              <a:rPr lang="en-US" smtClean="0"/>
+              <a:rPr lang="en-US"/>
               <a:t>Fourth level</a:t>
             </a:r>
           </a:p>
           <a:p>
             <a:pPr lvl="4"/>
             <a:r>
-              <a:rPr lang="en-US" smtClean="0"/>
+              <a:rPr lang="en-US"/>
               <a:t>Fifth level</a:t>
             </a:r>
-            <a:endParaRPr lang="en-US"/>
           </a:p>
         </p:txBody>
       </p:sp>
@@ -659,7 +730,7 @@
           <a:p>
             <a:fld id="{5BCAD085-E8A6-8845-BD4E-CB4CCA059FC4}" type="datetimeFigureOut">
               <a:rPr lang="en-US" smtClean="0"/>
-              <a:t>1/27/13</a:t>
+              <a:t>4/6/2026</a:t>
             </a:fld>
             <a:endParaRPr lang="en-US"/>
           </a:p>
@@ -753,10 +824,9 @@
           <a:lstStyle/>
           <a:p>
             <a:r>
-              <a:rPr lang="en-US" smtClean="0"/>
+              <a:rPr lang="en-US"/>
               <a:t>Click to edit Master title style</a:t>
             </a:r>
-            <a:endParaRPr lang="en-US"/>
           </a:p>
         </p:txBody>
       </p:sp>
@@ -777,38 +847,37 @@
           <a:p>
             <a:pPr lvl="0"/>
             <a:r>
-              <a:rPr lang="en-US" smtClean="0"/>
+              <a:rPr lang="en-US"/>
               <a:t>Click to edit Master text styles</a:t>
             </a:r>
           </a:p>
           <a:p>
             <a:pPr lvl="1"/>
             <a:r>
-              <a:rPr lang="en-US" smtClean="0"/>
+              <a:rPr lang="en-US"/>
               <a:t>Second level</a:t>
             </a:r>
           </a:p>
           <a:p>
             <a:pPr lvl="2"/>
             <a:r>
-              <a:rPr lang="en-US" smtClean="0"/>
+              <a:rPr lang="en-US"/>
               <a:t>Third level</a:t>
             </a:r>
           </a:p>
           <a:p>
             <a:pPr lvl="3"/>
             <a:r>
-              <a:rPr lang="en-US" smtClean="0"/>
+              <a:rPr lang="en-US"/>
               <a:t>Fourth level</a:t>
             </a:r>
           </a:p>
           <a:p>
             <a:pPr lvl="4"/>
             <a:r>
-              <a:rPr lang="en-US" smtClean="0"/>
+              <a:rPr lang="en-US"/>
               <a:t>Fifth level</a:t>
             </a:r>
-            <a:endParaRPr lang="en-US"/>
           </a:p>
         </p:txBody>
       </p:sp>
@@ -829,7 +898,7 @@
           <a:p>
             <a:fld id="{5BCAD085-E8A6-8845-BD4E-CB4CCA059FC4}" type="datetimeFigureOut">
               <a:rPr lang="en-US" smtClean="0"/>
-              <a:t>1/27/13</a:t>
+              <a:t>4/6/2026</a:t>
             </a:fld>
             <a:endParaRPr lang="en-US"/>
           </a:p>
@@ -932,10 +1001,9 @@
           </a:lstStyle>
           <a:p>
             <a:r>
-              <a:rPr lang="en-US" smtClean="0"/>
+              <a:rPr lang="en-US"/>
               <a:t>Click to edit Master title style</a:t>
             </a:r>
-            <a:endParaRPr lang="en-US"/>
           </a:p>
         </p:txBody>
       </p:sp>
@@ -1052,7 +1120,7 @@
           <a:p>
             <a:pPr lvl="0"/>
             <a:r>
-              <a:rPr lang="en-US" smtClean="0"/>
+              <a:rPr lang="en-US"/>
               <a:t>Click to edit Master text styles</a:t>
             </a:r>
           </a:p>
@@ -1075,7 +1143,7 @@
           <a:p>
             <a:fld id="{5BCAD085-E8A6-8845-BD4E-CB4CCA059FC4}" type="datetimeFigureOut">
               <a:rPr lang="en-US" smtClean="0"/>
-              <a:t>1/27/13</a:t>
+              <a:t>4/6/2026</a:t>
             </a:fld>
             <a:endParaRPr lang="en-US"/>
           </a:p>
@@ -1169,10 +1237,9 @@
           <a:lstStyle/>
           <a:p>
             <a:r>
-              <a:rPr lang="en-US" smtClean="0"/>
+              <a:rPr lang="en-US"/>
               <a:t>Click to edit Master title style</a:t>
             </a:r>
-            <a:endParaRPr lang="en-US"/>
           </a:p>
         </p:txBody>
       </p:sp>
@@ -1226,38 +1293,37 @@
           <a:p>
             <a:pPr lvl="0"/>
             <a:r>
-              <a:rPr lang="en-US" smtClean="0"/>
+              <a:rPr lang="en-US"/>
               <a:t>Click to edit Master text styles</a:t>
             </a:r>
           </a:p>
           <a:p>
             <a:pPr lvl="1"/>
             <a:r>
-              <a:rPr lang="en-US" smtClean="0"/>
+              <a:rPr lang="en-US"/>
               <a:t>Second level</a:t>
             </a:r>
           </a:p>
           <a:p>
             <a:pPr lvl="2"/>
             <a:r>
-              <a:rPr lang="en-US" smtClean="0"/>
+              <a:rPr lang="en-US"/>
               <a:t>Third level</a:t>
             </a:r>
           </a:p>
           <a:p>
             <a:pPr lvl="3"/>
             <a:r>
-              <a:rPr lang="en-US" smtClean="0"/>
+              <a:rPr lang="en-US"/>
               <a:t>Fourth level</a:t>
             </a:r>
           </a:p>
           <a:p>
             <a:pPr lvl="4"/>
             <a:r>
-              <a:rPr lang="en-US" smtClean="0"/>
+              <a:rPr lang="en-US"/>
               <a:t>Fifth level</a:t>
             </a:r>
-            <a:endParaRPr lang="en-US"/>
           </a:p>
         </p:txBody>
       </p:sp>
@@ -1311,38 +1377,37 @@
           <a:p>
             <a:pPr lvl="0"/>
             <a:r>
-              <a:rPr lang="en-US" smtClean="0"/>
+              <a:rPr lang="en-US"/>
               <a:t>Click to edit Master text styles</a:t>
             </a:r>
           </a:p>
           <a:p>
             <a:pPr lvl="1"/>
             <a:r>
-              <a:rPr lang="en-US" smtClean="0"/>
+              <a:rPr lang="en-US"/>
               <a:t>Second level</a:t>
             </a:r>
           </a:p>
           <a:p>
             <a:pPr lvl="2"/>
             <a:r>
-              <a:rPr lang="en-US" smtClean="0"/>
+              <a:rPr lang="en-US"/>
               <a:t>Third level</a:t>
             </a:r>
           </a:p>
           <a:p>
             <a:pPr lvl="3"/>
             <a:r>
-              <a:rPr lang="en-US" smtClean="0"/>
+              <a:rPr lang="en-US"/>
               <a:t>Fourth level</a:t>
             </a:r>
           </a:p>
           <a:p>
             <a:pPr lvl="4"/>
             <a:r>
-              <a:rPr lang="en-US" smtClean="0"/>
+              <a:rPr lang="en-US"/>
               <a:t>Fifth level</a:t>
             </a:r>
-            <a:endParaRPr lang="en-US"/>
           </a:p>
         </p:txBody>
       </p:sp>
@@ -1363,7 +1428,7 @@
           <a:p>
             <a:fld id="{5BCAD085-E8A6-8845-BD4E-CB4CCA059FC4}" type="datetimeFigureOut">
               <a:rPr lang="en-US" smtClean="0"/>
-              <a:t>1/27/13</a:t>
+              <a:t>4/6/2026</a:t>
             </a:fld>
             <a:endParaRPr lang="en-US"/>
           </a:p>
@@ -1461,10 +1526,9 @@
           </a:lstStyle>
           <a:p>
             <a:r>
-              <a:rPr lang="en-US" smtClean="0"/>
+              <a:rPr lang="en-US"/>
               <a:t>Click to edit Master title style</a:t>
             </a:r>
-            <a:endParaRPr lang="en-US"/>
           </a:p>
         </p:txBody>
       </p:sp>
@@ -1527,7 +1591,7 @@
           <a:p>
             <a:pPr lvl="0"/>
             <a:r>
-              <a:rPr lang="en-US" smtClean="0"/>
+              <a:rPr lang="en-US"/>
               <a:t>Click to edit Master text styles</a:t>
             </a:r>
           </a:p>
@@ -1583,38 +1647,37 @@
           <a:p>
             <a:pPr lvl="0"/>
             <a:r>
-              <a:rPr lang="en-US" smtClean="0"/>
+              <a:rPr lang="en-US"/>
               <a:t>Click to edit Master text styles</a:t>
             </a:r>
           </a:p>
           <a:p>
             <a:pPr lvl="1"/>
             <a:r>
-              <a:rPr lang="en-US" smtClean="0"/>
+              <a:rPr lang="en-US"/>
               <a:t>Second level</a:t>
             </a:r>
           </a:p>
           <a:p>
             <a:pPr lvl="2"/>
             <a:r>
-              <a:rPr lang="en-US" smtClean="0"/>
+              <a:rPr lang="en-US"/>
               <a:t>Third level</a:t>
             </a:r>
           </a:p>
           <a:p>
             <a:pPr lvl="3"/>
             <a:r>
-              <a:rPr lang="en-US" smtClean="0"/>
+              <a:rPr lang="en-US"/>
               <a:t>Fourth level</a:t>
             </a:r>
           </a:p>
           <a:p>
             <a:pPr lvl="4"/>
             <a:r>
-              <a:rPr lang="en-US" smtClean="0"/>
+              <a:rPr lang="en-US"/>
               <a:t>Fifth level</a:t>
             </a:r>
-            <a:endParaRPr lang="en-US"/>
           </a:p>
         </p:txBody>
       </p:sp>
@@ -1677,7 +1740,7 @@
           <a:p>
             <a:pPr lvl="0"/>
             <a:r>
-              <a:rPr lang="en-US" smtClean="0"/>
+              <a:rPr lang="en-US"/>
               <a:t>Click to edit Master text styles</a:t>
             </a:r>
           </a:p>
@@ -1733,38 +1796,37 @@
           <a:p>
             <a:pPr lvl="0"/>
             <a:r>
-              <a:rPr lang="en-US" smtClean="0"/>
+              <a:rPr lang="en-US"/>
               <a:t>Click to edit Master text styles</a:t>
             </a:r>
           </a:p>
           <a:p>
             <a:pPr lvl="1"/>
             <a:r>
-              <a:rPr lang="en-US" smtClean="0"/>
+              <a:rPr lang="en-US"/>
               <a:t>Second level</a:t>
             </a:r>
           </a:p>
           <a:p>
             <a:pPr lvl="2"/>
             <a:r>
-              <a:rPr lang="en-US" smtClean="0"/>
+              <a:rPr lang="en-US"/>
               <a:t>Third level</a:t>
             </a:r>
           </a:p>
           <a:p>
             <a:pPr lvl="3"/>
             <a:r>
-              <a:rPr lang="en-US" smtClean="0"/>
+              <a:rPr lang="en-US"/>
               <a:t>Fourth level</a:t>
             </a:r>
           </a:p>
           <a:p>
             <a:pPr lvl="4"/>
             <a:r>
-              <a:rPr lang="en-US" smtClean="0"/>
+              <a:rPr lang="en-US"/>
               <a:t>Fifth level</a:t>
             </a:r>
-            <a:endParaRPr lang="en-US"/>
           </a:p>
         </p:txBody>
       </p:sp>
@@ -1785,7 +1847,7 @@
           <a:p>
             <a:fld id="{5BCAD085-E8A6-8845-BD4E-CB4CCA059FC4}" type="datetimeFigureOut">
               <a:rPr lang="en-US" smtClean="0"/>
-              <a:t>1/27/13</a:t>
+              <a:t>4/6/2026</a:t>
             </a:fld>
             <a:endParaRPr lang="en-US"/>
           </a:p>
@@ -1879,10 +1941,9 @@
           <a:lstStyle/>
           <a:p>
             <a:r>
-              <a:rPr lang="en-US" smtClean="0"/>
+              <a:rPr lang="en-US"/>
               <a:t>Click to edit Master title style</a:t>
             </a:r>
-            <a:endParaRPr lang="en-US"/>
           </a:p>
         </p:txBody>
       </p:sp>
@@ -1903,7 +1964,7 @@
           <a:p>
             <a:fld id="{5BCAD085-E8A6-8845-BD4E-CB4CCA059FC4}" type="datetimeFigureOut">
               <a:rPr lang="en-US" smtClean="0"/>
-              <a:t>1/27/13</a:t>
+              <a:t>4/6/2026</a:t>
             </a:fld>
             <a:endParaRPr lang="en-US"/>
           </a:p>
@@ -1998,7 +2059,7 @@
           <a:p>
             <a:fld id="{5BCAD085-E8A6-8845-BD4E-CB4CCA059FC4}" type="datetimeFigureOut">
               <a:rPr lang="en-US" smtClean="0"/>
-              <a:t>1/27/13</a:t>
+              <a:t>4/6/2026</a:t>
             </a:fld>
             <a:endParaRPr lang="en-US"/>
           </a:p>
@@ -2101,10 +2162,9 @@
           </a:lstStyle>
           <a:p>
             <a:r>
-              <a:rPr lang="en-US" smtClean="0"/>
+              <a:rPr lang="en-US"/>
               <a:t>Click to edit Master title style</a:t>
             </a:r>
-            <a:endParaRPr lang="en-US"/>
           </a:p>
         </p:txBody>
       </p:sp>
@@ -2158,38 +2218,37 @@
           <a:p>
             <a:pPr lvl="0"/>
             <a:r>
-              <a:rPr lang="en-US" smtClean="0"/>
+              <a:rPr lang="en-US"/>
               <a:t>Click to edit Master text styles</a:t>
             </a:r>
           </a:p>
           <a:p>
             <a:pPr lvl="1"/>
             <a:r>
-              <a:rPr lang="en-US" smtClean="0"/>
+              <a:rPr lang="en-US"/>
               <a:t>Second level</a:t>
             </a:r>
           </a:p>
           <a:p>
             <a:pPr lvl="2"/>
             <a:r>
-              <a:rPr lang="en-US" smtClean="0"/>
+              <a:rPr lang="en-US"/>
               <a:t>Third level</a:t>
             </a:r>
           </a:p>
           <a:p>
             <a:pPr lvl="3"/>
             <a:r>
-              <a:rPr lang="en-US" smtClean="0"/>
+              <a:rPr lang="en-US"/>
               <a:t>Fourth level</a:t>
             </a:r>
           </a:p>
           <a:p>
             <a:pPr lvl="4"/>
             <a:r>
-              <a:rPr lang="en-US" smtClean="0"/>
+              <a:rPr lang="en-US"/>
               <a:t>Fifth level</a:t>
             </a:r>
-            <a:endParaRPr lang="en-US"/>
           </a:p>
         </p:txBody>
       </p:sp>
@@ -2252,7 +2311,7 @@
           <a:p>
             <a:pPr lvl="0"/>
             <a:r>
-              <a:rPr lang="en-US" smtClean="0"/>
+              <a:rPr lang="en-US"/>
               <a:t>Click to edit Master text styles</a:t>
             </a:r>
           </a:p>
@@ -2275,7 +2334,7 @@
           <a:p>
             <a:fld id="{5BCAD085-E8A6-8845-BD4E-CB4CCA059FC4}" type="datetimeFigureOut">
               <a:rPr lang="en-US" smtClean="0"/>
-              <a:t>1/27/13</a:t>
+              <a:t>4/6/2026</a:t>
             </a:fld>
             <a:endParaRPr lang="en-US"/>
           </a:p>
@@ -2378,10 +2437,9 @@
           </a:lstStyle>
           <a:p>
             <a:r>
-              <a:rPr lang="en-US" smtClean="0"/>
+              <a:rPr lang="en-US"/>
               <a:t>Click to edit Master title style</a:t>
             </a:r>
-            <a:endParaRPr lang="en-US"/>
           </a:p>
         </p:txBody>
       </p:sp>
@@ -2505,7 +2563,7 @@
           <a:p>
             <a:pPr lvl="0"/>
             <a:r>
-              <a:rPr lang="en-US" smtClean="0"/>
+              <a:rPr lang="en-US"/>
               <a:t>Click to edit Master text styles</a:t>
             </a:r>
           </a:p>
@@ -2528,7 +2586,7 @@
           <a:p>
             <a:fld id="{5BCAD085-E8A6-8845-BD4E-CB4CCA059FC4}" type="datetimeFigureOut">
               <a:rPr lang="en-US" smtClean="0"/>
-              <a:t>1/27/13</a:t>
+              <a:t>4/6/2026</a:t>
             </a:fld>
             <a:endParaRPr lang="en-US"/>
           </a:p>
@@ -2637,10 +2695,9 @@
           <a:lstStyle/>
           <a:p>
             <a:r>
-              <a:rPr lang="en-US" smtClean="0"/>
+              <a:rPr lang="en-US"/>
               <a:t>Click to edit Master title style</a:t>
             </a:r>
-            <a:endParaRPr lang="en-US"/>
           </a:p>
         </p:txBody>
       </p:sp>
@@ -2671,38 +2728,37 @@
           <a:p>
             <a:pPr lvl="0"/>
             <a:r>
-              <a:rPr lang="en-US" smtClean="0"/>
+              <a:rPr lang="en-US"/>
               <a:t>Click to edit Master text styles</a:t>
             </a:r>
           </a:p>
           <a:p>
             <a:pPr lvl="1"/>
             <a:r>
-              <a:rPr lang="en-US" smtClean="0"/>
+              <a:rPr lang="en-US"/>
               <a:t>Second level</a:t>
             </a:r>
           </a:p>
           <a:p>
             <a:pPr lvl="2"/>
             <a:r>
-              <a:rPr lang="en-US" smtClean="0"/>
+              <a:rPr lang="en-US"/>
               <a:t>Third level</a:t>
             </a:r>
           </a:p>
           <a:p>
             <a:pPr lvl="3"/>
             <a:r>
-              <a:rPr lang="en-US" smtClean="0"/>
+              <a:rPr lang="en-US"/>
               <a:t>Fourth level</a:t>
             </a:r>
           </a:p>
           <a:p>
             <a:pPr lvl="4"/>
             <a:r>
-              <a:rPr lang="en-US" smtClean="0"/>
+              <a:rPr lang="en-US"/>
               <a:t>Fifth level</a:t>
             </a:r>
-            <a:endParaRPr lang="en-US"/>
           </a:p>
         </p:txBody>
       </p:sp>
@@ -2741,7 +2797,7 @@
           <a:p>
             <a:fld id="{5BCAD085-E8A6-8845-BD4E-CB4CCA059FC4}" type="datetimeFigureOut">
               <a:rPr lang="en-US" smtClean="0"/>
-              <a:t>1/27/13</a:t>
+              <a:t>4/6/2026</a:t>
             </a:fld>
             <a:endParaRPr lang="en-US"/>
           </a:p>
@@ -3100,7 +3156,7 @@
 </file>
 
 <file path=ppt/slides/slide1.xml><?xml version="1.0" encoding="utf-8"?>
-<p:sld xmlns:a="http://schemas.openxmlformats.org/drawingml/2006/main" xmlns:p="http://schemas.openxmlformats.org/presentationml/2006/main" xmlns:r="http://schemas.openxmlformats.org/officeDocument/2006/relationships">
+<p:sld xmlns:a="http://schemas.openxmlformats.org/drawingml/2006/main" xmlns:r="http://schemas.openxmlformats.org/officeDocument/2006/relationships" xmlns:p="http://schemas.openxmlformats.org/presentationml/2006/main">
   <p:cSld>
     <p:spTree>
       <p:nvGrpSpPr>
@@ -3108,7 +3164,14 @@
         <p:cNvGrpSpPr/>
         <p:nvPr/>
       </p:nvGrpSpPr>
-      <p:grpSpPr/>
+      <p:grpSpPr>
+        <a:xfrm>
+          <a:off x="0" y="0"/>
+          <a:ext cx="0" cy="0"/>
+          <a:chOff x="0" y="0"/>
+          <a:chExt cx="0" cy="0"/>
+        </a:xfrm>
+      </p:grpSpPr>
       <p:sp>
         <p:nvSpPr>
           <p:cNvPr id="2" name="Rectangle 1"/>
@@ -3149,6 +3212,7 @@
           <a:lstStyle/>
           <a:p>
             <a:pPr algn="ctr"/>
+            <a:endParaRPr/>
           </a:p>
         </p:txBody>
       </p:sp>
@@ -3337,7 +3401,7 @@
 </file>
 
 <file path=ppt/slides/slide10.xml><?xml version="1.0" encoding="utf-8"?>
-<p:sld xmlns:a="http://schemas.openxmlformats.org/drawingml/2006/main" xmlns:p="http://schemas.openxmlformats.org/presentationml/2006/main" xmlns:r="http://schemas.openxmlformats.org/officeDocument/2006/relationships">
+<p:sld xmlns:a="http://schemas.openxmlformats.org/drawingml/2006/main" xmlns:r="http://schemas.openxmlformats.org/officeDocument/2006/relationships" xmlns:p="http://schemas.openxmlformats.org/presentationml/2006/main">
   <p:cSld>
     <p:bg>
       <p:bgPr>
@@ -3353,7 +3417,14 @@
         <p:cNvGrpSpPr/>
         <p:nvPr/>
       </p:nvGrpSpPr>
-      <p:grpSpPr/>
+      <p:grpSpPr>
+        <a:xfrm>
+          <a:off x="0" y="0"/>
+          <a:ext cx="0" cy="0"/>
+          <a:chOff x="0" y="0"/>
+          <a:chExt cx="0" cy="0"/>
+        </a:xfrm>
+      </p:grpSpPr>
       <p:sp>
         <p:nvSpPr>
           <p:cNvPr id="2" name="Rectangle 1"/>
@@ -3394,6 +3465,7 @@
           <a:lstStyle/>
           <a:p>
             <a:pPr algn="ctr"/>
+            <a:endParaRPr/>
           </a:p>
         </p:txBody>
       </p:sp>
@@ -3472,6 +3544,7 @@
           <a:lstStyle/>
           <a:p>
             <a:pPr algn="ctr"/>
+            <a:endParaRPr/>
           </a:p>
         </p:txBody>
       </p:sp>
@@ -3550,6 +3623,7 @@
           <a:lstStyle/>
           <a:p>
             <a:pPr algn="ctr"/>
+            <a:endParaRPr/>
           </a:p>
         </p:txBody>
       </p:sp>
@@ -3628,6 +3702,7 @@
           <a:lstStyle/>
           <a:p>
             <a:pPr algn="ctr"/>
+            <a:endParaRPr/>
           </a:p>
         </p:txBody>
       </p:sp>
@@ -3706,6 +3781,7 @@
           <a:lstStyle/>
           <a:p>
             <a:pPr algn="ctr"/>
+            <a:endParaRPr/>
           </a:p>
         </p:txBody>
       </p:sp>
@@ -3784,6 +3860,7 @@
           <a:lstStyle/>
           <a:p>
             <a:pPr algn="ctr"/>
+            <a:endParaRPr/>
           </a:p>
         </p:txBody>
       </p:sp>
@@ -3862,6 +3939,7 @@
           <a:lstStyle/>
           <a:p>
             <a:pPr algn="ctr"/>
+            <a:endParaRPr/>
           </a:p>
         </p:txBody>
       </p:sp>
@@ -3941,6 +4019,7 @@
           <a:lstStyle/>
           <a:p>
             <a:pPr algn="ctr"/>
+            <a:endParaRPr/>
           </a:p>
         </p:txBody>
       </p:sp>
@@ -4020,6 +4099,7 @@
           <a:lstStyle/>
           <a:p>
             <a:pPr algn="ctr"/>
+            <a:endParaRPr/>
           </a:p>
         </p:txBody>
       </p:sp>
@@ -4099,6 +4179,7 @@
           <a:lstStyle/>
           <a:p>
             <a:pPr algn="ctr"/>
+            <a:endParaRPr/>
           </a:p>
         </p:txBody>
       </p:sp>
@@ -4178,6 +4259,7 @@
           <a:lstStyle/>
           <a:p>
             <a:pPr algn="ctr"/>
+            <a:endParaRPr/>
           </a:p>
         </p:txBody>
       </p:sp>
@@ -4257,6 +4339,7 @@
           <a:lstStyle/>
           <a:p>
             <a:pPr algn="ctr"/>
+            <a:endParaRPr/>
           </a:p>
         </p:txBody>
       </p:sp>
@@ -4336,6 +4419,7 @@
           <a:lstStyle/>
           <a:p>
             <a:pPr algn="ctr"/>
+            <a:endParaRPr/>
           </a:p>
         </p:txBody>
       </p:sp>
@@ -4415,6 +4499,7 @@
           <a:lstStyle/>
           <a:p>
             <a:pPr algn="ctr"/>
+            <a:endParaRPr/>
           </a:p>
         </p:txBody>
       </p:sp>
@@ -4494,6 +4579,7 @@
           <a:lstStyle/>
           <a:p>
             <a:pPr algn="ctr"/>
+            <a:endParaRPr/>
           </a:p>
         </p:txBody>
       </p:sp>
@@ -4573,6 +4659,7 @@
           <a:lstStyle/>
           <a:p>
             <a:pPr algn="ctr"/>
+            <a:endParaRPr/>
           </a:p>
         </p:txBody>
       </p:sp>
@@ -4652,6 +4739,7 @@
           <a:lstStyle/>
           <a:p>
             <a:pPr algn="ctr"/>
+            <a:endParaRPr/>
           </a:p>
         </p:txBody>
       </p:sp>
@@ -4731,6 +4819,7 @@
           <a:lstStyle/>
           <a:p>
             <a:pPr algn="ctr"/>
+            <a:endParaRPr/>
           </a:p>
         </p:txBody>
       </p:sp>
@@ -4810,6 +4899,7 @@
           <a:lstStyle/>
           <a:p>
             <a:pPr algn="ctr"/>
+            <a:endParaRPr/>
           </a:p>
         </p:txBody>
       </p:sp>
@@ -4889,6 +4979,7 @@
           <a:lstStyle/>
           <a:p>
             <a:pPr algn="ctr"/>
+            <a:endParaRPr/>
           </a:p>
         </p:txBody>
       </p:sp>
@@ -4968,6 +5059,7 @@
           <a:lstStyle/>
           <a:p>
             <a:pPr algn="ctr"/>
+            <a:endParaRPr/>
           </a:p>
         </p:txBody>
       </p:sp>
@@ -5047,6 +5139,7 @@
           <a:lstStyle/>
           <a:p>
             <a:pPr algn="ctr"/>
+            <a:endParaRPr/>
           </a:p>
         </p:txBody>
       </p:sp>
@@ -5094,7 +5187,7 @@
 </file>
 
 <file path=ppt/slides/slide11.xml><?xml version="1.0" encoding="utf-8"?>
-<p:sld xmlns:a="http://schemas.openxmlformats.org/drawingml/2006/main" xmlns:p="http://schemas.openxmlformats.org/presentationml/2006/main" xmlns:r="http://schemas.openxmlformats.org/officeDocument/2006/relationships">
+<p:sld xmlns:a="http://schemas.openxmlformats.org/drawingml/2006/main" xmlns:r="http://schemas.openxmlformats.org/officeDocument/2006/relationships" xmlns:p="http://schemas.openxmlformats.org/presentationml/2006/main">
   <p:cSld>
     <p:bg>
       <p:bgPr>
@@ -5110,7 +5203,14 @@
         <p:cNvGrpSpPr/>
         <p:nvPr/>
       </p:nvGrpSpPr>
-      <p:grpSpPr/>
+      <p:grpSpPr>
+        <a:xfrm>
+          <a:off x="0" y="0"/>
+          <a:ext cx="0" cy="0"/>
+          <a:chOff x="0" y="0"/>
+          <a:chExt cx="0" cy="0"/>
+        </a:xfrm>
+      </p:grpSpPr>
       <p:sp>
         <p:nvSpPr>
           <p:cNvPr id="2" name="TextBox 1"/>
@@ -5155,7 +5255,7 @@
 </file>
 
 <file path=ppt/slides/slide12.xml><?xml version="1.0" encoding="utf-8"?>
-<p:sld xmlns:a="http://schemas.openxmlformats.org/drawingml/2006/main" xmlns:p="http://schemas.openxmlformats.org/presentationml/2006/main" xmlns:r="http://schemas.openxmlformats.org/officeDocument/2006/relationships">
+<p:sld xmlns:a="http://schemas.openxmlformats.org/drawingml/2006/main" xmlns:r="http://schemas.openxmlformats.org/officeDocument/2006/relationships" xmlns:p="http://schemas.openxmlformats.org/presentationml/2006/main">
   <p:cSld>
     <p:bg>
       <p:bgPr>
@@ -5171,7 +5271,14 @@
         <p:cNvGrpSpPr/>
         <p:nvPr/>
       </p:nvGrpSpPr>
-      <p:grpSpPr/>
+      <p:grpSpPr>
+        <a:xfrm>
+          <a:off x="0" y="0"/>
+          <a:ext cx="0" cy="0"/>
+          <a:chOff x="0" y="0"/>
+          <a:chExt cx="0" cy="0"/>
+        </a:xfrm>
+      </p:grpSpPr>
       <p:sp>
         <p:nvSpPr>
           <p:cNvPr id="2" name="Rectangle 1"/>
@@ -5212,6 +5319,7 @@
           <a:lstStyle/>
           <a:p>
             <a:pPr algn="ctr"/>
+            <a:endParaRPr/>
           </a:p>
         </p:txBody>
       </p:sp>
@@ -5290,6 +5398,7 @@
           <a:lstStyle/>
           <a:p>
             <a:pPr algn="ctr"/>
+            <a:endParaRPr/>
           </a:p>
         </p:txBody>
       </p:sp>
@@ -5459,6 +5568,7 @@
           <a:lstStyle/>
           <a:p>
             <a:pPr algn="ctr"/>
+            <a:endParaRPr/>
           </a:p>
         </p:txBody>
       </p:sp>
@@ -5628,6 +5738,7 @@
           <a:lstStyle/>
           <a:p>
             <a:pPr algn="ctr"/>
+            <a:endParaRPr/>
           </a:p>
         </p:txBody>
       </p:sp>
@@ -5675,7 +5786,7 @@
 </file>
 
 <file path=ppt/slides/slide13.xml><?xml version="1.0" encoding="utf-8"?>
-<p:sld xmlns:a="http://schemas.openxmlformats.org/drawingml/2006/main" xmlns:p="http://schemas.openxmlformats.org/presentationml/2006/main" xmlns:r="http://schemas.openxmlformats.org/officeDocument/2006/relationships">
+<p:sld xmlns:a="http://schemas.openxmlformats.org/drawingml/2006/main" xmlns:r="http://schemas.openxmlformats.org/officeDocument/2006/relationships" xmlns:p="http://schemas.openxmlformats.org/presentationml/2006/main">
   <p:cSld>
     <p:bg>
       <p:bgPr>
@@ -5691,7 +5802,14 @@
         <p:cNvGrpSpPr/>
         <p:nvPr/>
       </p:nvGrpSpPr>
-      <p:grpSpPr/>
+      <p:grpSpPr>
+        <a:xfrm>
+          <a:off x="0" y="0"/>
+          <a:ext cx="0" cy="0"/>
+          <a:chOff x="0" y="0"/>
+          <a:chExt cx="0" cy="0"/>
+        </a:xfrm>
+      </p:grpSpPr>
       <p:sp>
         <p:nvSpPr>
           <p:cNvPr id="2" name="Rectangle 1"/>
@@ -5732,6 +5850,7 @@
           <a:lstStyle/>
           <a:p>
             <a:pPr algn="ctr"/>
+            <a:endParaRPr/>
           </a:p>
         </p:txBody>
       </p:sp>
@@ -5810,6 +5929,7 @@
           <a:lstStyle/>
           <a:p>
             <a:pPr algn="ctr"/>
+            <a:endParaRPr/>
           </a:p>
         </p:txBody>
       </p:sp>
@@ -5975,6 +6095,7 @@
           <a:lstStyle/>
           <a:p>
             <a:pPr algn="ctr"/>
+            <a:endParaRPr/>
           </a:p>
         </p:txBody>
       </p:sp>
@@ -6022,7 +6143,7 @@
 </file>
 
 <file path=ppt/slides/slide14.xml><?xml version="1.0" encoding="utf-8"?>
-<p:sld xmlns:a="http://schemas.openxmlformats.org/drawingml/2006/main" xmlns:p="http://schemas.openxmlformats.org/presentationml/2006/main" xmlns:r="http://schemas.openxmlformats.org/officeDocument/2006/relationships">
+<p:sld xmlns:a="http://schemas.openxmlformats.org/drawingml/2006/main" xmlns:r="http://schemas.openxmlformats.org/officeDocument/2006/relationships" xmlns:p="http://schemas.openxmlformats.org/presentationml/2006/main">
   <p:cSld>
     <p:bg>
       <p:bgPr>
@@ -6038,7 +6159,14 @@
         <p:cNvGrpSpPr/>
         <p:nvPr/>
       </p:nvGrpSpPr>
-      <p:grpSpPr/>
+      <p:grpSpPr>
+        <a:xfrm>
+          <a:off x="0" y="0"/>
+          <a:ext cx="0" cy="0"/>
+          <a:chOff x="0" y="0"/>
+          <a:chExt cx="0" cy="0"/>
+        </a:xfrm>
+      </p:grpSpPr>
       <p:sp>
         <p:nvSpPr>
           <p:cNvPr id="2" name="TextBox 1"/>
@@ -6083,7 +6211,7 @@
 </file>
 
 <file path=ppt/slides/slide15.xml><?xml version="1.0" encoding="utf-8"?>
-<p:sld xmlns:a="http://schemas.openxmlformats.org/drawingml/2006/main" xmlns:p="http://schemas.openxmlformats.org/presentationml/2006/main" xmlns:r="http://schemas.openxmlformats.org/officeDocument/2006/relationships">
+<p:sld xmlns:a="http://schemas.openxmlformats.org/drawingml/2006/main" xmlns:r="http://schemas.openxmlformats.org/officeDocument/2006/relationships" xmlns:p="http://schemas.openxmlformats.org/presentationml/2006/main">
   <p:cSld>
     <p:bg>
       <p:bgPr>
@@ -6099,7 +6227,14 @@
         <p:cNvGrpSpPr/>
         <p:nvPr/>
       </p:nvGrpSpPr>
-      <p:grpSpPr/>
+      <p:grpSpPr>
+        <a:xfrm>
+          <a:off x="0" y="0"/>
+          <a:ext cx="0" cy="0"/>
+          <a:chOff x="0" y="0"/>
+          <a:chExt cx="0" cy="0"/>
+        </a:xfrm>
+      </p:grpSpPr>
       <p:sp>
         <p:nvSpPr>
           <p:cNvPr id="2" name="Rectangle 1"/>
@@ -6140,6 +6275,7 @@
           <a:lstStyle/>
           <a:p>
             <a:pPr algn="ctr"/>
+            <a:endParaRPr/>
           </a:p>
         </p:txBody>
       </p:sp>
@@ -6433,6 +6569,7 @@
           <a:lstStyle/>
           <a:p>
             <a:pPr algn="ctr"/>
+            <a:endParaRPr/>
           </a:p>
         </p:txBody>
       </p:sp>
@@ -6480,7 +6617,7 @@
 </file>
 
 <file path=ppt/slides/slide16.xml><?xml version="1.0" encoding="utf-8"?>
-<p:sld xmlns:a="http://schemas.openxmlformats.org/drawingml/2006/main" xmlns:p="http://schemas.openxmlformats.org/presentationml/2006/main" xmlns:r="http://schemas.openxmlformats.org/officeDocument/2006/relationships">
+<p:sld xmlns:a="http://schemas.openxmlformats.org/drawingml/2006/main" xmlns:r="http://schemas.openxmlformats.org/officeDocument/2006/relationships" xmlns:p="http://schemas.openxmlformats.org/presentationml/2006/main">
   <p:cSld>
     <p:bg>
       <p:bgPr>
@@ -6496,7 +6633,14 @@
         <p:cNvGrpSpPr/>
         <p:nvPr/>
       </p:nvGrpSpPr>
-      <p:grpSpPr/>
+      <p:grpSpPr>
+        <a:xfrm>
+          <a:off x="0" y="0"/>
+          <a:ext cx="0" cy="0"/>
+          <a:chOff x="0" y="0"/>
+          <a:chExt cx="0" cy="0"/>
+        </a:xfrm>
+      </p:grpSpPr>
       <p:sp>
         <p:nvSpPr>
           <p:cNvPr id="2" name="TextBox 1"/>
@@ -6541,7 +6685,7 @@
 </file>
 
 <file path=ppt/slides/slide17.xml><?xml version="1.0" encoding="utf-8"?>
-<p:sld xmlns:a="http://schemas.openxmlformats.org/drawingml/2006/main" xmlns:p="http://schemas.openxmlformats.org/presentationml/2006/main" xmlns:r="http://schemas.openxmlformats.org/officeDocument/2006/relationships">
+<p:sld xmlns:a="http://schemas.openxmlformats.org/drawingml/2006/main" xmlns:r="http://schemas.openxmlformats.org/officeDocument/2006/relationships" xmlns:p="http://schemas.openxmlformats.org/presentationml/2006/main">
   <p:cSld>
     <p:bg>
       <p:bgPr>
@@ -6557,7 +6701,14 @@
         <p:cNvGrpSpPr/>
         <p:nvPr/>
       </p:nvGrpSpPr>
-      <p:grpSpPr/>
+      <p:grpSpPr>
+        <a:xfrm>
+          <a:off x="0" y="0"/>
+          <a:ext cx="0" cy="0"/>
+          <a:chOff x="0" y="0"/>
+          <a:chExt cx="0" cy="0"/>
+        </a:xfrm>
+      </p:grpSpPr>
       <p:sp>
         <p:nvSpPr>
           <p:cNvPr id="2" name="Rectangle 1"/>
@@ -6598,6 +6749,7 @@
           <a:lstStyle/>
           <a:p>
             <a:pPr algn="ctr"/>
+            <a:endParaRPr/>
           </a:p>
         </p:txBody>
       </p:sp>
@@ -6676,6 +6828,7 @@
           <a:lstStyle/>
           <a:p>
             <a:pPr algn="ctr"/>
+            <a:endParaRPr/>
           </a:p>
         </p:txBody>
       </p:sp>
@@ -6754,6 +6907,7 @@
           <a:lstStyle/>
           <a:p>
             <a:pPr algn="ctr"/>
+            <a:endParaRPr/>
           </a:p>
         </p:txBody>
       </p:sp>
@@ -6832,6 +6986,7 @@
           <a:lstStyle/>
           <a:p>
             <a:pPr algn="ctr"/>
+            <a:endParaRPr/>
           </a:p>
         </p:txBody>
       </p:sp>
@@ -6910,6 +7065,7 @@
           <a:lstStyle/>
           <a:p>
             <a:pPr algn="ctr"/>
+            <a:endParaRPr/>
           </a:p>
         </p:txBody>
       </p:sp>
@@ -6988,6 +7144,7 @@
           <a:lstStyle/>
           <a:p>
             <a:pPr algn="ctr"/>
+            <a:endParaRPr/>
           </a:p>
         </p:txBody>
       </p:sp>
@@ -7066,6 +7223,7 @@
           <a:lstStyle/>
           <a:p>
             <a:pPr algn="ctr"/>
+            <a:endParaRPr/>
           </a:p>
         </p:txBody>
       </p:sp>
@@ -7144,6 +7302,7 @@
           <a:lstStyle/>
           <a:p>
             <a:pPr algn="ctr"/>
+            <a:endParaRPr/>
           </a:p>
         </p:txBody>
       </p:sp>
@@ -7222,6 +7381,7 @@
           <a:lstStyle/>
           <a:p>
             <a:pPr algn="ctr"/>
+            <a:endParaRPr/>
           </a:p>
         </p:txBody>
       </p:sp>
@@ -7300,6 +7460,7 @@
           <a:lstStyle/>
           <a:p>
             <a:pPr algn="ctr"/>
+            <a:endParaRPr/>
           </a:p>
         </p:txBody>
       </p:sp>
@@ -7378,6 +7539,7 @@
           <a:lstStyle/>
           <a:p>
             <a:pPr algn="ctr"/>
+            <a:endParaRPr/>
           </a:p>
         </p:txBody>
       </p:sp>
@@ -7456,6 +7618,7 @@
           <a:lstStyle/>
           <a:p>
             <a:pPr algn="ctr"/>
+            <a:endParaRPr/>
           </a:p>
         </p:txBody>
       </p:sp>
@@ -7534,6 +7697,7 @@
           <a:lstStyle/>
           <a:p>
             <a:pPr algn="ctr"/>
+            <a:endParaRPr/>
           </a:p>
         </p:txBody>
       </p:sp>
@@ -7612,6 +7776,7 @@
           <a:lstStyle/>
           <a:p>
             <a:pPr algn="ctr"/>
+            <a:endParaRPr/>
           </a:p>
         </p:txBody>
       </p:sp>
@@ -7690,6 +7855,7 @@
           <a:lstStyle/>
           <a:p>
             <a:pPr algn="ctr"/>
+            <a:endParaRPr/>
           </a:p>
         </p:txBody>
       </p:sp>
@@ -7768,6 +7934,7 @@
           <a:lstStyle/>
           <a:p>
             <a:pPr algn="ctr"/>
+            <a:endParaRPr/>
           </a:p>
         </p:txBody>
       </p:sp>
@@ -7846,6 +8013,7 @@
           <a:lstStyle/>
           <a:p>
             <a:pPr algn="ctr"/>
+            <a:endParaRPr/>
           </a:p>
         </p:txBody>
       </p:sp>
@@ -7924,6 +8092,7 @@
           <a:lstStyle/>
           <a:p>
             <a:pPr algn="ctr"/>
+            <a:endParaRPr/>
           </a:p>
         </p:txBody>
       </p:sp>
@@ -8002,6 +8171,7 @@
           <a:lstStyle/>
           <a:p>
             <a:pPr algn="ctr"/>
+            <a:endParaRPr/>
           </a:p>
         </p:txBody>
       </p:sp>
@@ -8080,6 +8250,7 @@
           <a:lstStyle/>
           <a:p>
             <a:pPr algn="ctr"/>
+            <a:endParaRPr/>
           </a:p>
         </p:txBody>
       </p:sp>
@@ -8158,6 +8329,7 @@
           <a:lstStyle/>
           <a:p>
             <a:pPr algn="ctr"/>
+            <a:endParaRPr/>
           </a:p>
         </p:txBody>
       </p:sp>
@@ -8236,6 +8408,7 @@
           <a:lstStyle/>
           <a:p>
             <a:pPr algn="ctr"/>
+            <a:endParaRPr/>
           </a:p>
         </p:txBody>
       </p:sp>
@@ -8314,6 +8487,7 @@
           <a:lstStyle/>
           <a:p>
             <a:pPr algn="ctr"/>
+            <a:endParaRPr/>
           </a:p>
         </p:txBody>
       </p:sp>
@@ -8392,6 +8566,7 @@
           <a:lstStyle/>
           <a:p>
             <a:pPr algn="ctr"/>
+            <a:endParaRPr/>
           </a:p>
         </p:txBody>
       </p:sp>
@@ -8470,6 +8645,7 @@
           <a:lstStyle/>
           <a:p>
             <a:pPr algn="ctr"/>
+            <a:endParaRPr/>
           </a:p>
         </p:txBody>
       </p:sp>
@@ -8548,6 +8724,7 @@
           <a:lstStyle/>
           <a:p>
             <a:pPr algn="ctr"/>
+            <a:endParaRPr/>
           </a:p>
         </p:txBody>
       </p:sp>
@@ -8626,6 +8803,7 @@
           <a:lstStyle/>
           <a:p>
             <a:pPr algn="ctr"/>
+            <a:endParaRPr/>
           </a:p>
         </p:txBody>
       </p:sp>
@@ -8704,6 +8882,7 @@
           <a:lstStyle/>
           <a:p>
             <a:pPr algn="ctr"/>
+            <a:endParaRPr/>
           </a:p>
         </p:txBody>
       </p:sp>
@@ -8782,6 +8961,7 @@
           <a:lstStyle/>
           <a:p>
             <a:pPr algn="ctr"/>
+            <a:endParaRPr/>
           </a:p>
         </p:txBody>
       </p:sp>
@@ -8808,15 +8988,7 @@
           <a:lstStyle/>
           <a:p>
             <a:pPr algn="l"/>
-            <a:r>
-              <a:rPr sz="1200" b="0">
-                <a:solidFill>
-                  <a:srgbClr val="1A1A2E"/>
-                </a:solidFill>
-                <a:latin typeface="Calibri"/>
-              </a:rPr>
-              <a:t/>
-            </a:r>
+            <a:endParaRPr/>
           </a:p>
         </p:txBody>
       </p:sp>
@@ -8860,6 +9032,7 @@
           <a:lstStyle/>
           <a:p>
             <a:pPr algn="ctr"/>
+            <a:endParaRPr/>
           </a:p>
         </p:txBody>
       </p:sp>
@@ -8907,7 +9080,7 @@
 </file>
 
 <file path=ppt/slides/slide18.xml><?xml version="1.0" encoding="utf-8"?>
-<p:sld xmlns:a="http://schemas.openxmlformats.org/drawingml/2006/main" xmlns:p="http://schemas.openxmlformats.org/presentationml/2006/main" xmlns:r="http://schemas.openxmlformats.org/officeDocument/2006/relationships">
+<p:sld xmlns:a="http://schemas.openxmlformats.org/drawingml/2006/main" xmlns:r="http://schemas.openxmlformats.org/officeDocument/2006/relationships" xmlns:p="http://schemas.openxmlformats.org/presentationml/2006/main">
   <p:cSld>
     <p:bg>
       <p:bgPr>
@@ -8923,7 +9096,14 @@
         <p:cNvGrpSpPr/>
         <p:nvPr/>
       </p:nvGrpSpPr>
-      <p:grpSpPr/>
+      <p:grpSpPr>
+        <a:xfrm>
+          <a:off x="0" y="0"/>
+          <a:ext cx="0" cy="0"/>
+          <a:chOff x="0" y="0"/>
+          <a:chExt cx="0" cy="0"/>
+        </a:xfrm>
+      </p:grpSpPr>
       <p:sp>
         <p:nvSpPr>
           <p:cNvPr id="2" name="Rectangle 1"/>
@@ -8964,6 +9144,7 @@
           <a:lstStyle/>
           <a:p>
             <a:pPr algn="ctr"/>
+            <a:endParaRPr/>
           </a:p>
         </p:txBody>
       </p:sp>
@@ -9042,6 +9223,7 @@
           <a:lstStyle/>
           <a:p>
             <a:pPr algn="ctr"/>
+            <a:endParaRPr/>
           </a:p>
         </p:txBody>
       </p:sp>
@@ -9207,6 +9389,7 @@
           <a:lstStyle/>
           <a:p>
             <a:pPr algn="ctr"/>
+            <a:endParaRPr/>
           </a:p>
         </p:txBody>
       </p:sp>
@@ -9254,7 +9437,7 @@
 </file>
 
 <file path=ppt/slides/slide19.xml><?xml version="1.0" encoding="utf-8"?>
-<p:sld xmlns:a="http://schemas.openxmlformats.org/drawingml/2006/main" xmlns:p="http://schemas.openxmlformats.org/presentationml/2006/main" xmlns:r="http://schemas.openxmlformats.org/officeDocument/2006/relationships">
+<p:sld xmlns:a="http://schemas.openxmlformats.org/drawingml/2006/main" xmlns:r="http://schemas.openxmlformats.org/officeDocument/2006/relationships" xmlns:p="http://schemas.openxmlformats.org/presentationml/2006/main">
   <p:cSld>
     <p:bg>
       <p:bgPr>
@@ -9270,7 +9453,14 @@
         <p:cNvGrpSpPr/>
         <p:nvPr/>
       </p:nvGrpSpPr>
-      <p:grpSpPr/>
+      <p:grpSpPr>
+        <a:xfrm>
+          <a:off x="0" y="0"/>
+          <a:ext cx="0" cy="0"/>
+          <a:chOff x="0" y="0"/>
+          <a:chExt cx="0" cy="0"/>
+        </a:xfrm>
+      </p:grpSpPr>
       <p:sp>
         <p:nvSpPr>
           <p:cNvPr id="2" name="TextBox 1"/>
@@ -9315,7 +9505,7 @@
 </file>
 
 <file path=ppt/slides/slide2.xml><?xml version="1.0" encoding="utf-8"?>
-<p:sld xmlns:a="http://schemas.openxmlformats.org/drawingml/2006/main" xmlns:p="http://schemas.openxmlformats.org/presentationml/2006/main" xmlns:r="http://schemas.openxmlformats.org/officeDocument/2006/relationships">
+<p:sld xmlns:a="http://schemas.openxmlformats.org/drawingml/2006/main" xmlns:r="http://schemas.openxmlformats.org/officeDocument/2006/relationships" xmlns:p="http://schemas.openxmlformats.org/presentationml/2006/main">
   <p:cSld>
     <p:bg>
       <p:bgPr>
@@ -9331,7 +9521,14 @@
         <p:cNvGrpSpPr/>
         <p:nvPr/>
       </p:nvGrpSpPr>
-      <p:grpSpPr/>
+      <p:grpSpPr>
+        <a:xfrm>
+          <a:off x="0" y="0"/>
+          <a:ext cx="0" cy="0"/>
+          <a:chOff x="0" y="0"/>
+          <a:chExt cx="0" cy="0"/>
+        </a:xfrm>
+      </p:grpSpPr>
       <p:sp>
         <p:nvSpPr>
           <p:cNvPr id="2" name="Rectangle 1"/>
@@ -9372,6 +9569,7 @@
           <a:lstStyle/>
           <a:p>
             <a:pPr algn="ctr"/>
+            <a:endParaRPr/>
           </a:p>
         </p:txBody>
       </p:sp>
@@ -9617,6 +9815,7 @@
           <a:lstStyle/>
           <a:p>
             <a:pPr algn="ctr"/>
+            <a:endParaRPr/>
           </a:p>
         </p:txBody>
       </p:sp>
@@ -9664,7 +9863,7 @@
 </file>
 
 <file path=ppt/slides/slide20.xml><?xml version="1.0" encoding="utf-8"?>
-<p:sld xmlns:a="http://schemas.openxmlformats.org/drawingml/2006/main" xmlns:p="http://schemas.openxmlformats.org/presentationml/2006/main" xmlns:r="http://schemas.openxmlformats.org/officeDocument/2006/relationships">
+<p:sld xmlns:a="http://schemas.openxmlformats.org/drawingml/2006/main" xmlns:r="http://schemas.openxmlformats.org/officeDocument/2006/relationships" xmlns:p="http://schemas.openxmlformats.org/presentationml/2006/main">
   <p:cSld>
     <p:bg>
       <p:bgPr>
@@ -9680,7 +9879,14 @@
         <p:cNvGrpSpPr/>
         <p:nvPr/>
       </p:nvGrpSpPr>
-      <p:grpSpPr/>
+      <p:grpSpPr>
+        <a:xfrm>
+          <a:off x="0" y="0"/>
+          <a:ext cx="0" cy="0"/>
+          <a:chOff x="0" y="0"/>
+          <a:chExt cx="0" cy="0"/>
+        </a:xfrm>
+      </p:grpSpPr>
       <p:sp>
         <p:nvSpPr>
           <p:cNvPr id="2" name="Rectangle 1"/>
@@ -9721,6 +9927,7 @@
           <a:lstStyle/>
           <a:p>
             <a:pPr algn="ctr"/>
+            <a:endParaRPr/>
           </a:p>
         </p:txBody>
       </p:sp>
@@ -9799,6 +10006,7 @@
           <a:lstStyle/>
           <a:p>
             <a:pPr algn="ctr"/>
+            <a:endParaRPr/>
           </a:p>
         </p:txBody>
       </p:sp>
@@ -9877,6 +10085,7 @@
           <a:lstStyle/>
           <a:p>
             <a:pPr algn="ctr"/>
+            <a:endParaRPr/>
           </a:p>
         </p:txBody>
       </p:sp>
@@ -9955,6 +10164,7 @@
           <a:lstStyle/>
           <a:p>
             <a:pPr algn="ctr"/>
+            <a:endParaRPr/>
           </a:p>
         </p:txBody>
       </p:sp>
@@ -10033,6 +10243,7 @@
           <a:lstStyle/>
           <a:p>
             <a:pPr algn="ctr"/>
+            <a:endParaRPr/>
           </a:p>
         </p:txBody>
       </p:sp>
@@ -10111,6 +10322,7 @@
           <a:lstStyle/>
           <a:p>
             <a:pPr algn="ctr"/>
+            <a:endParaRPr/>
           </a:p>
         </p:txBody>
       </p:sp>
@@ -10189,6 +10401,7 @@
           <a:lstStyle/>
           <a:p>
             <a:pPr algn="ctr"/>
+            <a:endParaRPr/>
           </a:p>
         </p:txBody>
       </p:sp>
@@ -10267,6 +10480,7 @@
           <a:lstStyle/>
           <a:p>
             <a:pPr algn="ctr"/>
+            <a:endParaRPr/>
           </a:p>
         </p:txBody>
       </p:sp>
@@ -10279,7 +10493,7 @@
         <p:spPr>
           <a:xfrm>
             <a:off x="2752344" y="1618488"/>
-            <a:ext cx="2157984" cy="365759"/>
+            <a:ext cx="2157984" cy="276999"/>
           </a:xfrm>
           <a:prstGeom prst="rect">
             <a:avLst/>
@@ -10292,16 +10506,38 @@
           </a:bodyPr>
           <a:lstStyle/>
           <a:p>
-            <a:pPr algn="l"/>
-            <a:r>
-              <a:rPr sz="1200" b="0">
+            <a:r>
+              <a:rPr lang="zh-CN" altLang="en-US" sz="1200" b="0" dirty="0">
                 <a:solidFill>
                   <a:srgbClr val="1A1A2E"/>
                 </a:solidFill>
                 <a:latin typeface="Calibri"/>
               </a:rPr>
-              <a:t>月1–2</a:t>
-            </a:r>
+              <a:t>第</a:t>
+            </a:r>
+            <a:r>
+              <a:rPr sz="1200" b="0" dirty="0">
+                <a:solidFill>
+                  <a:srgbClr val="1A1A2E"/>
+                </a:solidFill>
+                <a:latin typeface="Calibri"/>
+              </a:rPr>
+              <a:t>1–2</a:t>
+            </a:r>
+            <a:r>
+              <a:rPr lang="zh-CN" altLang="en-US" sz="1200" dirty="0">
+                <a:solidFill>
+                  <a:srgbClr val="1A1A2E"/>
+                </a:solidFill>
+              </a:rPr>
+              <a:t> 月</a:t>
+            </a:r>
+            <a:endParaRPr sz="1200" b="0" dirty="0">
+              <a:solidFill>
+                <a:srgbClr val="1A1A2E"/>
+              </a:solidFill>
+              <a:latin typeface="Calibri"/>
+            </a:endParaRPr>
           </a:p>
         </p:txBody>
       </p:sp>
@@ -10345,6 +10581,7 @@
           <a:lstStyle/>
           <a:p>
             <a:pPr algn="ctr"/>
+            <a:endParaRPr/>
           </a:p>
         </p:txBody>
       </p:sp>
@@ -10423,6 +10660,7 @@
           <a:lstStyle/>
           <a:p>
             <a:pPr algn="ctr"/>
+            <a:endParaRPr/>
           </a:p>
         </p:txBody>
       </p:sp>
@@ -10501,6 +10739,7 @@
           <a:lstStyle/>
           <a:p>
             <a:pPr algn="ctr"/>
+            <a:endParaRPr/>
           </a:p>
         </p:txBody>
       </p:sp>
@@ -10579,6 +10818,7 @@
           <a:lstStyle/>
           <a:p>
             <a:pPr algn="ctr"/>
+            <a:endParaRPr/>
           </a:p>
         </p:txBody>
       </p:sp>
@@ -10657,6 +10897,7 @@
           <a:lstStyle/>
           <a:p>
             <a:pPr algn="ctr"/>
+            <a:endParaRPr/>
           </a:p>
         </p:txBody>
       </p:sp>
@@ -10669,7 +10910,7 @@
         <p:spPr>
           <a:xfrm>
             <a:off x="2752344" y="2057400"/>
-            <a:ext cx="2157984" cy="365759"/>
+            <a:ext cx="2157984" cy="276999"/>
           </a:xfrm>
           <a:prstGeom prst="rect">
             <a:avLst/>
@@ -10682,15 +10923,29 @@
           </a:bodyPr>
           <a:lstStyle/>
           <a:p>
-            <a:pPr algn="l"/>
-            <a:r>
-              <a:rPr sz="1200" b="0">
+            <a:r>
+              <a:rPr lang="zh-CN" altLang="en-US" sz="1200" dirty="0">
                 <a:solidFill>
                   <a:srgbClr val="1A1A2E"/>
                 </a:solidFill>
-                <a:latin typeface="Calibri"/>
-              </a:rPr>
-              <a:t>月3–4</a:t>
+              </a:rPr>
+              <a:t>第</a:t>
+            </a:r>
+            <a:r>
+              <a:rPr lang="en-US" altLang="zh-CN" sz="1200" dirty="0">
+                <a:solidFill>
+                  <a:srgbClr val="1A1A2E"/>
+                </a:solidFill>
+              </a:rPr>
+              <a:t>3–4</a:t>
+            </a:r>
+            <a:r>
+              <a:rPr lang="zh-CN" altLang="en-US" sz="1200" dirty="0">
+                <a:solidFill>
+                  <a:srgbClr val="1A1A2E"/>
+                </a:solidFill>
+              </a:rPr>
+              <a:t> 月</a:t>
             </a:r>
           </a:p>
         </p:txBody>
@@ -10735,6 +10990,7 @@
           <a:lstStyle/>
           <a:p>
             <a:pPr algn="ctr"/>
+            <a:endParaRPr/>
           </a:p>
         </p:txBody>
       </p:sp>
@@ -10813,6 +11069,7 @@
           <a:lstStyle/>
           <a:p>
             <a:pPr algn="ctr"/>
+            <a:endParaRPr/>
           </a:p>
         </p:txBody>
       </p:sp>
@@ -10891,6 +11148,7 @@
           <a:lstStyle/>
           <a:p>
             <a:pPr algn="ctr"/>
+            <a:endParaRPr/>
           </a:p>
         </p:txBody>
       </p:sp>
@@ -10969,6 +11227,7 @@
           <a:lstStyle/>
           <a:p>
             <a:pPr algn="ctr"/>
+            <a:endParaRPr/>
           </a:p>
         </p:txBody>
       </p:sp>
@@ -11047,6 +11306,7 @@
           <a:lstStyle/>
           <a:p>
             <a:pPr algn="ctr"/>
+            <a:endParaRPr/>
           </a:p>
         </p:txBody>
       </p:sp>
@@ -11059,7 +11319,7 @@
         <p:spPr>
           <a:xfrm>
             <a:off x="2752344" y="2496312"/>
-            <a:ext cx="2157984" cy="365759"/>
+            <a:ext cx="2157984" cy="276999"/>
           </a:xfrm>
           <a:prstGeom prst="rect">
             <a:avLst/>
@@ -11072,15 +11332,29 @@
           </a:bodyPr>
           <a:lstStyle/>
           <a:p>
-            <a:pPr algn="l"/>
-            <a:r>
-              <a:rPr sz="1200" b="0">
+            <a:r>
+              <a:rPr lang="zh-CN" altLang="en-US" sz="1200" dirty="0">
                 <a:solidFill>
                   <a:srgbClr val="1A1A2E"/>
                 </a:solidFill>
-                <a:latin typeface="Calibri"/>
-              </a:rPr>
-              <a:t>月5–9</a:t>
+              </a:rPr>
+              <a:t>第</a:t>
+            </a:r>
+            <a:r>
+              <a:rPr lang="en-US" altLang="zh-CN" sz="1200" dirty="0">
+                <a:solidFill>
+                  <a:srgbClr val="1A1A2E"/>
+                </a:solidFill>
+              </a:rPr>
+              <a:t>5–9</a:t>
+            </a:r>
+            <a:r>
+              <a:rPr lang="zh-CN" altLang="en-US" sz="1200" dirty="0">
+                <a:solidFill>
+                  <a:srgbClr val="1A1A2E"/>
+                </a:solidFill>
+              </a:rPr>
+              <a:t>月</a:t>
             </a:r>
           </a:p>
         </p:txBody>
@@ -11125,6 +11399,7 @@
           <a:lstStyle/>
           <a:p>
             <a:pPr algn="ctr"/>
+            <a:endParaRPr/>
           </a:p>
         </p:txBody>
       </p:sp>
@@ -11203,6 +11478,7 @@
           <a:lstStyle/>
           <a:p>
             <a:pPr algn="ctr"/>
+            <a:endParaRPr/>
           </a:p>
         </p:txBody>
       </p:sp>
@@ -11281,6 +11557,7 @@
           <a:lstStyle/>
           <a:p>
             <a:pPr algn="ctr"/>
+            <a:endParaRPr/>
           </a:p>
         </p:txBody>
       </p:sp>
@@ -11359,6 +11636,7 @@
           <a:lstStyle/>
           <a:p>
             <a:pPr algn="ctr"/>
+            <a:endParaRPr/>
           </a:p>
         </p:txBody>
       </p:sp>
@@ -11437,6 +11715,7 @@
           <a:lstStyle/>
           <a:p>
             <a:pPr algn="ctr"/>
+            <a:endParaRPr/>
           </a:p>
         </p:txBody>
       </p:sp>
@@ -11449,7 +11728,7 @@
         <p:spPr>
           <a:xfrm>
             <a:off x="2752344" y="2935224"/>
-            <a:ext cx="2157984" cy="365759"/>
+            <a:ext cx="2157984" cy="276999"/>
           </a:xfrm>
           <a:prstGeom prst="rect">
             <a:avLst/>
@@ -11462,15 +11741,29 @@
           </a:bodyPr>
           <a:lstStyle/>
           <a:p>
-            <a:pPr algn="l"/>
-            <a:r>
-              <a:rPr sz="1200" b="0">
+            <a:r>
+              <a:rPr lang="zh-CN" altLang="en-US" sz="1200" dirty="0">
                 <a:solidFill>
                   <a:srgbClr val="1A1A2E"/>
                 </a:solidFill>
-                <a:latin typeface="Calibri"/>
-              </a:rPr>
-              <a:t>月10–12</a:t>
+              </a:rPr>
+              <a:t>第</a:t>
+            </a:r>
+            <a:r>
+              <a:rPr lang="en-US" altLang="zh-CN" sz="1200" dirty="0">
+                <a:solidFill>
+                  <a:srgbClr val="1A1A2E"/>
+                </a:solidFill>
+              </a:rPr>
+              <a:t>10–12</a:t>
+            </a:r>
+            <a:r>
+              <a:rPr lang="zh-CN" altLang="en-US" sz="1200" dirty="0">
+                <a:solidFill>
+                  <a:srgbClr val="1A1A2E"/>
+                </a:solidFill>
+              </a:rPr>
+              <a:t> 月</a:t>
             </a:r>
           </a:p>
         </p:txBody>
@@ -11515,6 +11808,7 @@
           <a:lstStyle/>
           <a:p>
             <a:pPr algn="ctr"/>
+            <a:endParaRPr/>
           </a:p>
         </p:txBody>
       </p:sp>
@@ -11593,6 +11887,7 @@
           <a:lstStyle/>
           <a:p>
             <a:pPr algn="ctr"/>
+            <a:endParaRPr/>
           </a:p>
         </p:txBody>
       </p:sp>
@@ -11671,6 +11966,7 @@
           <a:lstStyle/>
           <a:p>
             <a:pPr algn="ctr"/>
+            <a:endParaRPr/>
           </a:p>
         </p:txBody>
       </p:sp>
@@ -11749,6 +12045,7 @@
           <a:lstStyle/>
           <a:p>
             <a:pPr algn="ctr"/>
+            <a:endParaRPr/>
           </a:p>
         </p:txBody>
       </p:sp>
@@ -11827,6 +12124,7 @@
           <a:lstStyle/>
           <a:p>
             <a:pPr algn="ctr"/>
+            <a:endParaRPr/>
           </a:p>
         </p:txBody>
       </p:sp>
@@ -11839,7 +12137,7 @@
         <p:spPr>
           <a:xfrm>
             <a:off x="2752344" y="3374136"/>
-            <a:ext cx="2157984" cy="365759"/>
+            <a:ext cx="2157984" cy="276999"/>
           </a:xfrm>
           <a:prstGeom prst="rect">
             <a:avLst/>
@@ -11854,14 +12152,20 @@
           <a:p>
             <a:pPr algn="l"/>
             <a:r>
-              <a:rPr sz="1200" b="0">
+              <a:rPr lang="zh-CN" altLang="en-US" sz="1200" b="0" dirty="0">
                 <a:solidFill>
                   <a:srgbClr val="1A1A2E"/>
                 </a:solidFill>
                 <a:latin typeface="Calibri"/>
               </a:rPr>
-              <a:t>Year 2+</a:t>
-            </a:r>
+              <a:t>第二年</a:t>
+            </a:r>
+            <a:endParaRPr sz="1200" b="0" dirty="0">
+              <a:solidFill>
+                <a:srgbClr val="1A1A2E"/>
+              </a:solidFill>
+              <a:latin typeface="Calibri"/>
+            </a:endParaRPr>
           </a:p>
         </p:txBody>
       </p:sp>
@@ -11905,6 +12209,7 @@
           <a:lstStyle/>
           <a:p>
             <a:pPr algn="ctr"/>
+            <a:endParaRPr/>
           </a:p>
         </p:txBody>
       </p:sp>
@@ -11983,6 +12288,7 @@
           <a:lstStyle/>
           <a:p>
             <a:pPr algn="ctr"/>
+            <a:endParaRPr/>
           </a:p>
         </p:txBody>
       </p:sp>
@@ -12061,6 +12367,7 @@
           <a:lstStyle/>
           <a:p>
             <a:pPr algn="ctr"/>
+            <a:endParaRPr/>
           </a:p>
         </p:txBody>
       </p:sp>
@@ -12139,6 +12446,7 @@
           <a:lstStyle/>
           <a:p>
             <a:pPr algn="ctr"/>
+            <a:endParaRPr/>
           </a:p>
         </p:txBody>
       </p:sp>
@@ -12186,7 +12494,7 @@
 </file>
 
 <file path=ppt/slides/slide21.xml><?xml version="1.0" encoding="utf-8"?>
-<p:sld xmlns:a="http://schemas.openxmlformats.org/drawingml/2006/main" xmlns:p="http://schemas.openxmlformats.org/presentationml/2006/main" xmlns:r="http://schemas.openxmlformats.org/officeDocument/2006/relationships">
+<p:sld xmlns:a="http://schemas.openxmlformats.org/drawingml/2006/main" xmlns:r="http://schemas.openxmlformats.org/officeDocument/2006/relationships" xmlns:p="http://schemas.openxmlformats.org/presentationml/2006/main">
   <p:cSld>
     <p:bg>
       <p:bgPr>
@@ -12202,7 +12510,14 @@
         <p:cNvGrpSpPr/>
         <p:nvPr/>
       </p:nvGrpSpPr>
-      <p:grpSpPr/>
+      <p:grpSpPr>
+        <a:xfrm>
+          <a:off x="0" y="0"/>
+          <a:ext cx="0" cy="0"/>
+          <a:chOff x="0" y="0"/>
+          <a:chExt cx="0" cy="0"/>
+        </a:xfrm>
+      </p:grpSpPr>
       <p:sp>
         <p:nvSpPr>
           <p:cNvPr id="2" name="Rectangle 1"/>
@@ -12243,6 +12558,7 @@
           <a:lstStyle/>
           <a:p>
             <a:pPr algn="ctr"/>
+            <a:endParaRPr/>
           </a:p>
         </p:txBody>
       </p:sp>
@@ -12440,6 +12756,7 @@
           <a:lstStyle/>
           <a:p>
             <a:pPr algn="ctr"/>
+            <a:endParaRPr/>
           </a:p>
         </p:txBody>
       </p:sp>
@@ -12487,7 +12804,7 @@
 </file>
 
 <file path=ppt/slides/slide22.xml><?xml version="1.0" encoding="utf-8"?>
-<p:sld xmlns:a="http://schemas.openxmlformats.org/drawingml/2006/main" xmlns:p="http://schemas.openxmlformats.org/presentationml/2006/main" xmlns:r="http://schemas.openxmlformats.org/officeDocument/2006/relationships">
+<p:sld xmlns:a="http://schemas.openxmlformats.org/drawingml/2006/main" xmlns:r="http://schemas.openxmlformats.org/officeDocument/2006/relationships" xmlns:p="http://schemas.openxmlformats.org/presentationml/2006/main">
   <p:cSld>
     <p:spTree>
       <p:nvGrpSpPr>
@@ -12495,7 +12812,14 @@
         <p:cNvGrpSpPr/>
         <p:nvPr/>
       </p:nvGrpSpPr>
-      <p:grpSpPr/>
+      <p:grpSpPr>
+        <a:xfrm>
+          <a:off x="0" y="0"/>
+          <a:ext cx="0" cy="0"/>
+          <a:chOff x="0" y="0"/>
+          <a:chExt cx="0" cy="0"/>
+        </a:xfrm>
+      </p:grpSpPr>
       <p:sp>
         <p:nvSpPr>
           <p:cNvPr id="2" name="Rectangle 1"/>
@@ -12536,6 +12860,7 @@
           <a:lstStyle/>
           <a:p>
             <a:pPr algn="ctr"/>
+            <a:endParaRPr/>
           </a:p>
         </p:txBody>
       </p:sp>
@@ -12614,6 +12939,7 @@
           <a:lstStyle/>
           <a:p>
             <a:pPr algn="ctr"/>
+            <a:endParaRPr/>
           </a:p>
         </p:txBody>
       </p:sp>
@@ -12657,6 +12983,7 @@
           <a:lstStyle/>
           <a:p>
             <a:pPr algn="ctr"/>
+            <a:endParaRPr/>
           </a:p>
         </p:txBody>
       </p:sp>
@@ -12735,6 +13062,7 @@
           <a:lstStyle/>
           <a:p>
             <a:pPr algn="ctr"/>
+            <a:endParaRPr/>
           </a:p>
         </p:txBody>
       </p:sp>
@@ -12813,6 +13141,7 @@
           <a:lstStyle/>
           <a:p>
             <a:pPr algn="ctr"/>
+            <a:endParaRPr/>
           </a:p>
         </p:txBody>
       </p:sp>
@@ -12895,7 +13224,7 @@
 </file>
 
 <file path=ppt/slides/slide3.xml><?xml version="1.0" encoding="utf-8"?>
-<p:sld xmlns:a="http://schemas.openxmlformats.org/drawingml/2006/main" xmlns:p="http://schemas.openxmlformats.org/presentationml/2006/main" xmlns:r="http://schemas.openxmlformats.org/officeDocument/2006/relationships">
+<p:sld xmlns:a="http://schemas.openxmlformats.org/drawingml/2006/main" xmlns:r="http://schemas.openxmlformats.org/officeDocument/2006/relationships" xmlns:p="http://schemas.openxmlformats.org/presentationml/2006/main">
   <p:cSld>
     <p:bg>
       <p:bgPr>
@@ -12911,7 +13240,14 @@
         <p:cNvGrpSpPr/>
         <p:nvPr/>
       </p:nvGrpSpPr>
-      <p:grpSpPr/>
+      <p:grpSpPr>
+        <a:xfrm>
+          <a:off x="0" y="0"/>
+          <a:ext cx="0" cy="0"/>
+          <a:chOff x="0" y="0"/>
+          <a:chExt cx="0" cy="0"/>
+        </a:xfrm>
+      </p:grpSpPr>
       <p:sp>
         <p:nvSpPr>
           <p:cNvPr id="2" name="TextBox 1"/>
@@ -12956,7 +13292,7 @@
 </file>
 
 <file path=ppt/slides/slide4.xml><?xml version="1.0" encoding="utf-8"?>
-<p:sld xmlns:a="http://schemas.openxmlformats.org/drawingml/2006/main" xmlns:p="http://schemas.openxmlformats.org/presentationml/2006/main" xmlns:r="http://schemas.openxmlformats.org/officeDocument/2006/relationships">
+<p:sld xmlns:a="http://schemas.openxmlformats.org/drawingml/2006/main" xmlns:r="http://schemas.openxmlformats.org/officeDocument/2006/relationships" xmlns:p="http://schemas.openxmlformats.org/presentationml/2006/main">
   <p:cSld>
     <p:bg>
       <p:bgPr>
@@ -12972,7 +13308,14 @@
         <p:cNvGrpSpPr/>
         <p:nvPr/>
       </p:nvGrpSpPr>
-      <p:grpSpPr/>
+      <p:grpSpPr>
+        <a:xfrm>
+          <a:off x="0" y="0"/>
+          <a:ext cx="0" cy="0"/>
+          <a:chOff x="0" y="0"/>
+          <a:chExt cx="0" cy="0"/>
+        </a:xfrm>
+      </p:grpSpPr>
       <p:sp>
         <p:nvSpPr>
           <p:cNvPr id="2" name="Rectangle 1"/>
@@ -13013,6 +13356,7 @@
           <a:lstStyle/>
           <a:p>
             <a:pPr algn="ctr"/>
+            <a:endParaRPr/>
           </a:p>
         </p:txBody>
       </p:sp>
@@ -13091,6 +13435,7 @@
           <a:lstStyle/>
           <a:p>
             <a:pPr algn="ctr"/>
+            <a:endParaRPr/>
           </a:p>
         </p:txBody>
       </p:sp>
@@ -13206,6 +13551,7 @@
           <a:lstStyle/>
           <a:p>
             <a:pPr algn="ctr"/>
+            <a:endParaRPr/>
           </a:p>
         </p:txBody>
       </p:sp>
@@ -13321,6 +13667,7 @@
           <a:lstStyle/>
           <a:p>
             <a:pPr algn="ctr"/>
+            <a:endParaRPr/>
           </a:p>
         </p:txBody>
       </p:sp>
@@ -13436,6 +13783,7 @@
           <a:lstStyle/>
           <a:p>
             <a:pPr algn="ctr"/>
+            <a:endParaRPr/>
           </a:p>
         </p:txBody>
       </p:sp>
@@ -13551,6 +13899,7 @@
           <a:lstStyle/>
           <a:p>
             <a:pPr algn="ctr"/>
+            <a:endParaRPr/>
           </a:p>
         </p:txBody>
       </p:sp>
@@ -13598,7 +13947,7 @@
 </file>
 
 <file path=ppt/slides/slide5.xml><?xml version="1.0" encoding="utf-8"?>
-<p:sld xmlns:a="http://schemas.openxmlformats.org/drawingml/2006/main" xmlns:p="http://schemas.openxmlformats.org/presentationml/2006/main" xmlns:r="http://schemas.openxmlformats.org/officeDocument/2006/relationships">
+<p:sld xmlns:a="http://schemas.openxmlformats.org/drawingml/2006/main" xmlns:r="http://schemas.openxmlformats.org/officeDocument/2006/relationships" xmlns:p="http://schemas.openxmlformats.org/presentationml/2006/main">
   <p:cSld>
     <p:bg>
       <p:bgPr>
@@ -13614,7 +13963,14 @@
         <p:cNvGrpSpPr/>
         <p:nvPr/>
       </p:nvGrpSpPr>
-      <p:grpSpPr/>
+      <p:grpSpPr>
+        <a:xfrm>
+          <a:off x="0" y="0"/>
+          <a:ext cx="0" cy="0"/>
+          <a:chOff x="0" y="0"/>
+          <a:chExt cx="0" cy="0"/>
+        </a:xfrm>
+      </p:grpSpPr>
       <p:sp>
         <p:nvSpPr>
           <p:cNvPr id="2" name="Rectangle 1"/>
@@ -13655,6 +14011,7 @@
           <a:lstStyle/>
           <a:p>
             <a:pPr algn="ctr"/>
+            <a:endParaRPr/>
           </a:p>
         </p:txBody>
       </p:sp>
@@ -13820,6 +14177,7 @@
           <a:lstStyle/>
           <a:p>
             <a:pPr algn="ctr"/>
+            <a:endParaRPr/>
           </a:p>
         </p:txBody>
       </p:sp>
@@ -13867,7 +14225,7 @@
 </file>
 
 <file path=ppt/slides/slide6.xml><?xml version="1.0" encoding="utf-8"?>
-<p:sld xmlns:a="http://schemas.openxmlformats.org/drawingml/2006/main" xmlns:p="http://schemas.openxmlformats.org/presentationml/2006/main" xmlns:r="http://schemas.openxmlformats.org/officeDocument/2006/relationships">
+<p:sld xmlns:a="http://schemas.openxmlformats.org/drawingml/2006/main" xmlns:r="http://schemas.openxmlformats.org/officeDocument/2006/relationships" xmlns:p="http://schemas.openxmlformats.org/presentationml/2006/main">
   <p:cSld>
     <p:bg>
       <p:bgPr>
@@ -13883,7 +14241,14 @@
         <p:cNvGrpSpPr/>
         <p:nvPr/>
       </p:nvGrpSpPr>
-      <p:grpSpPr/>
+      <p:grpSpPr>
+        <a:xfrm>
+          <a:off x="0" y="0"/>
+          <a:ext cx="0" cy="0"/>
+          <a:chOff x="0" y="0"/>
+          <a:chExt cx="0" cy="0"/>
+        </a:xfrm>
+      </p:grpSpPr>
       <p:sp>
         <p:nvSpPr>
           <p:cNvPr id="2" name="TextBox 1"/>
@@ -13928,7 +14293,7 @@
 </file>
 
 <file path=ppt/slides/slide7.xml><?xml version="1.0" encoding="utf-8"?>
-<p:sld xmlns:a="http://schemas.openxmlformats.org/drawingml/2006/main" xmlns:p="http://schemas.openxmlformats.org/presentationml/2006/main" xmlns:r="http://schemas.openxmlformats.org/officeDocument/2006/relationships">
+<p:sld xmlns:a="http://schemas.openxmlformats.org/drawingml/2006/main" xmlns:r="http://schemas.openxmlformats.org/officeDocument/2006/relationships" xmlns:p="http://schemas.openxmlformats.org/presentationml/2006/main">
   <p:cSld>
     <p:bg>
       <p:bgPr>
@@ -13944,7 +14309,14 @@
         <p:cNvGrpSpPr/>
         <p:nvPr/>
       </p:nvGrpSpPr>
-      <p:grpSpPr/>
+      <p:grpSpPr>
+        <a:xfrm>
+          <a:off x="0" y="0"/>
+          <a:ext cx="0" cy="0"/>
+          <a:chOff x="0" y="0"/>
+          <a:chExt cx="0" cy="0"/>
+        </a:xfrm>
+      </p:grpSpPr>
       <p:sp>
         <p:nvSpPr>
           <p:cNvPr id="2" name="Rectangle 1"/>
@@ -13985,6 +14357,7 @@
           <a:lstStyle/>
           <a:p>
             <a:pPr algn="ctr"/>
+            <a:endParaRPr/>
           </a:p>
         </p:txBody>
       </p:sp>
@@ -14063,6 +14436,7 @@
           <a:lstStyle/>
           <a:p>
             <a:pPr algn="ctr"/>
+            <a:endParaRPr/>
           </a:p>
         </p:txBody>
       </p:sp>
@@ -14141,6 +14515,7 @@
           <a:lstStyle/>
           <a:p>
             <a:pPr algn="ctr"/>
+            <a:endParaRPr/>
           </a:p>
         </p:txBody>
       </p:sp>
@@ -14219,6 +14594,7 @@
           <a:lstStyle/>
           <a:p>
             <a:pPr algn="ctr"/>
+            <a:endParaRPr/>
           </a:p>
         </p:txBody>
       </p:sp>
@@ -14297,6 +14673,7 @@
           <a:lstStyle/>
           <a:p>
             <a:pPr algn="ctr"/>
+            <a:endParaRPr/>
           </a:p>
         </p:txBody>
       </p:sp>
@@ -14375,6 +14752,7 @@
           <a:lstStyle/>
           <a:p>
             <a:pPr algn="ctr"/>
+            <a:endParaRPr/>
           </a:p>
         </p:txBody>
       </p:sp>
@@ -14453,6 +14831,7 @@
           <a:lstStyle/>
           <a:p>
             <a:pPr algn="ctr"/>
+            <a:endParaRPr/>
           </a:p>
         </p:txBody>
       </p:sp>
@@ -14531,6 +14910,7 @@
           <a:lstStyle/>
           <a:p>
             <a:pPr algn="ctr"/>
+            <a:endParaRPr/>
           </a:p>
         </p:txBody>
       </p:sp>
@@ -14609,6 +14989,7 @@
           <a:lstStyle/>
           <a:p>
             <a:pPr algn="ctr"/>
+            <a:endParaRPr/>
           </a:p>
         </p:txBody>
       </p:sp>
@@ -14687,6 +15068,7 @@
           <a:lstStyle/>
           <a:p>
             <a:pPr algn="ctr"/>
+            <a:endParaRPr/>
           </a:p>
         </p:txBody>
       </p:sp>
@@ -14765,6 +15147,7 @@
           <a:lstStyle/>
           <a:p>
             <a:pPr algn="ctr"/>
+            <a:endParaRPr/>
           </a:p>
         </p:txBody>
       </p:sp>
@@ -14843,6 +15226,7 @@
           <a:lstStyle/>
           <a:p>
             <a:pPr algn="ctr"/>
+            <a:endParaRPr/>
           </a:p>
         </p:txBody>
       </p:sp>
@@ -14921,6 +15305,7 @@
           <a:lstStyle/>
           <a:p>
             <a:pPr algn="ctr"/>
+            <a:endParaRPr/>
           </a:p>
         </p:txBody>
       </p:sp>
@@ -14999,6 +15384,7 @@
           <a:lstStyle/>
           <a:p>
             <a:pPr algn="ctr"/>
+            <a:endParaRPr/>
           </a:p>
         </p:txBody>
       </p:sp>
@@ -15077,6 +15463,7 @@
           <a:lstStyle/>
           <a:p>
             <a:pPr algn="ctr"/>
+            <a:endParaRPr/>
           </a:p>
         </p:txBody>
       </p:sp>
@@ -15155,6 +15542,7 @@
           <a:lstStyle/>
           <a:p>
             <a:pPr algn="ctr"/>
+            <a:endParaRPr/>
           </a:p>
         </p:txBody>
       </p:sp>
@@ -15233,6 +15621,7 @@
           <a:lstStyle/>
           <a:p>
             <a:pPr algn="ctr"/>
+            <a:endParaRPr/>
           </a:p>
         </p:txBody>
       </p:sp>
@@ -15311,6 +15700,7 @@
           <a:lstStyle/>
           <a:p>
             <a:pPr algn="ctr"/>
+            <a:endParaRPr/>
           </a:p>
         </p:txBody>
       </p:sp>
@@ -15389,6 +15779,7 @@
           <a:lstStyle/>
           <a:p>
             <a:pPr algn="ctr"/>
+            <a:endParaRPr/>
           </a:p>
         </p:txBody>
       </p:sp>
@@ -15467,6 +15858,7 @@
           <a:lstStyle/>
           <a:p>
             <a:pPr algn="ctr"/>
+            <a:endParaRPr/>
           </a:p>
         </p:txBody>
       </p:sp>
@@ -15545,6 +15937,7 @@
           <a:lstStyle/>
           <a:p>
             <a:pPr algn="ctr"/>
+            <a:endParaRPr/>
           </a:p>
         </p:txBody>
       </p:sp>
@@ -15623,6 +16016,7 @@
           <a:lstStyle/>
           <a:p>
             <a:pPr algn="ctr"/>
+            <a:endParaRPr/>
           </a:p>
         </p:txBody>
       </p:sp>
@@ -15701,6 +16095,7 @@
           <a:lstStyle/>
           <a:p>
             <a:pPr algn="ctr"/>
+            <a:endParaRPr/>
           </a:p>
         </p:txBody>
       </p:sp>
@@ -15779,6 +16174,7 @@
           <a:lstStyle/>
           <a:p>
             <a:pPr algn="ctr"/>
+            <a:endParaRPr/>
           </a:p>
         </p:txBody>
       </p:sp>
@@ -15857,6 +16253,7 @@
           <a:lstStyle/>
           <a:p>
             <a:pPr algn="ctr"/>
+            <a:endParaRPr/>
           </a:p>
         </p:txBody>
       </p:sp>
@@ -15935,6 +16332,7 @@
           <a:lstStyle/>
           <a:p>
             <a:pPr algn="ctr"/>
+            <a:endParaRPr/>
           </a:p>
         </p:txBody>
       </p:sp>
@@ -16013,6 +16411,7 @@
           <a:lstStyle/>
           <a:p>
             <a:pPr algn="ctr"/>
+            <a:endParaRPr/>
           </a:p>
         </p:txBody>
       </p:sp>
@@ -16091,6 +16490,7 @@
           <a:lstStyle/>
           <a:p>
             <a:pPr algn="ctr"/>
+            <a:endParaRPr/>
           </a:p>
         </p:txBody>
       </p:sp>
@@ -16169,6 +16569,7 @@
           <a:lstStyle/>
           <a:p>
             <a:pPr algn="ctr"/>
+            <a:endParaRPr/>
           </a:p>
         </p:txBody>
       </p:sp>
@@ -16247,6 +16648,7 @@
           <a:lstStyle/>
           <a:p>
             <a:pPr algn="ctr"/>
+            <a:endParaRPr/>
           </a:p>
         </p:txBody>
       </p:sp>
@@ -16325,6 +16727,7 @@
           <a:lstStyle/>
           <a:p>
             <a:pPr algn="ctr"/>
+            <a:endParaRPr/>
           </a:p>
         </p:txBody>
       </p:sp>
@@ -16403,6 +16806,7 @@
           <a:lstStyle/>
           <a:p>
             <a:pPr algn="ctr"/>
+            <a:endParaRPr/>
           </a:p>
         </p:txBody>
       </p:sp>
@@ -16450,7 +16854,7 @@
 </file>
 
 <file path=ppt/slides/slide8.xml><?xml version="1.0" encoding="utf-8"?>
-<p:sld xmlns:a="http://schemas.openxmlformats.org/drawingml/2006/main" xmlns:p="http://schemas.openxmlformats.org/presentationml/2006/main" xmlns:r="http://schemas.openxmlformats.org/officeDocument/2006/relationships">
+<p:sld xmlns:a="http://schemas.openxmlformats.org/drawingml/2006/main" xmlns:r="http://schemas.openxmlformats.org/officeDocument/2006/relationships" xmlns:p="http://schemas.openxmlformats.org/presentationml/2006/main">
   <p:cSld>
     <p:bg>
       <p:bgPr>
@@ -16466,7 +16870,14 @@
         <p:cNvGrpSpPr/>
         <p:nvPr/>
       </p:nvGrpSpPr>
-      <p:grpSpPr/>
+      <p:grpSpPr>
+        <a:xfrm>
+          <a:off x="0" y="0"/>
+          <a:ext cx="0" cy="0"/>
+          <a:chOff x="0" y="0"/>
+          <a:chExt cx="0" cy="0"/>
+        </a:xfrm>
+      </p:grpSpPr>
       <p:sp>
         <p:nvSpPr>
           <p:cNvPr id="2" name="Rectangle 1"/>
@@ -16507,6 +16918,7 @@
           <a:lstStyle/>
           <a:p>
             <a:pPr algn="ctr"/>
+            <a:endParaRPr/>
           </a:p>
         </p:txBody>
       </p:sp>
@@ -16585,6 +16997,7 @@
           <a:lstStyle/>
           <a:p>
             <a:pPr algn="ctr"/>
+            <a:endParaRPr/>
           </a:p>
         </p:txBody>
       </p:sp>
@@ -16750,6 +17163,7 @@
           <a:lstStyle/>
           <a:p>
             <a:pPr algn="ctr"/>
+            <a:endParaRPr/>
           </a:p>
         </p:txBody>
       </p:sp>
@@ -16797,7 +17211,7 @@
 </file>
 
 <file path=ppt/slides/slide9.xml><?xml version="1.0" encoding="utf-8"?>
-<p:sld xmlns:a="http://schemas.openxmlformats.org/drawingml/2006/main" xmlns:p="http://schemas.openxmlformats.org/presentationml/2006/main" xmlns:r="http://schemas.openxmlformats.org/officeDocument/2006/relationships">
+<p:sld xmlns:a="http://schemas.openxmlformats.org/drawingml/2006/main" xmlns:r="http://schemas.openxmlformats.org/officeDocument/2006/relationships" xmlns:p="http://schemas.openxmlformats.org/presentationml/2006/main">
   <p:cSld>
     <p:bg>
       <p:bgPr>
@@ -16813,7 +17227,14 @@
         <p:cNvGrpSpPr/>
         <p:nvPr/>
       </p:nvGrpSpPr>
-      <p:grpSpPr/>
+      <p:grpSpPr>
+        <a:xfrm>
+          <a:off x="0" y="0"/>
+          <a:ext cx="0" cy="0"/>
+          <a:chOff x="0" y="0"/>
+          <a:chExt cx="0" cy="0"/>
+        </a:xfrm>
+      </p:grpSpPr>
       <p:sp>
         <p:nvSpPr>
           <p:cNvPr id="2" name="TextBox 1"/>
